--- a/Presentacion_Hexagrama.pptx
+++ b/Presentacion_Hexagrama.pptx
@@ -5,17 +5,17 @@
     <p:sldMasterId id="2147483648" r:id="rId1"/>
   </p:sldMasterIdLst>
   <p:sldIdLst>
-    <p:sldId id="256" r:id="rId7"/>
-    <p:sldId id="257" r:id="rId8"/>
-    <p:sldId id="258" r:id="rId9"/>
-    <p:sldId id="259" r:id="rId10"/>
-    <p:sldId id="260" r:id="rId11"/>
-    <p:sldId id="261" r:id="rId12"/>
-    <p:sldId id="262" r:id="rId13"/>
-    <p:sldId id="263" r:id="rId14"/>
-    <p:sldId id="264" r:id="rId15"/>
+    <p:sldId id="256" r:id="rId2"/>
+    <p:sldId id="257" r:id="rId3"/>
+    <p:sldId id="258" r:id="rId4"/>
+    <p:sldId id="259" r:id="rId5"/>
+    <p:sldId id="260" r:id="rId6"/>
+    <p:sldId id="261" r:id="rId7"/>
+    <p:sldId id="262" r:id="rId8"/>
+    <p:sldId id="263" r:id="rId9"/>
+    <p:sldId id="264" r:id="rId10"/>
   </p:sldIdLst>
-  <p:sldSz cx="12191695" cy="6858000" type="screen4x3"/>
+  <p:sldSz cx="12192000" cy="6858000"/>
   <p:notesSz cx="6858000" cy="9144000"/>
   <p:defaultTextStyle>
     <a:defPPr>
@@ -112,6 +112,22 @@
       </a:defRPr>
     </a:lvl9pPr>
   </p:defaultTextStyle>
+  <p:extLst>
+    <p:ext uri="{EFAFB233-063F-42B5-8137-9DF3F51BA10A}">
+      <p15:sldGuideLst xmlns:p15="http://schemas.microsoft.com/office/powerpoint/2012/main">
+        <p15:guide id="1" orient="horz" pos="2160">
+          <p15:clr>
+            <a:srgbClr val="A4A3A4"/>
+          </p15:clr>
+        </p15:guide>
+        <p15:guide id="2" pos="2880">
+          <p15:clr>
+            <a:srgbClr val="A4A3A4"/>
+          </p15:clr>
+        </p15:guide>
+      </p15:sldGuideLst>
+    </p:ext>
+  </p:extLst>
 </p:presentation>
 </file>
 
@@ -153,10 +169,9 @@
           <a:lstStyle/>
           <a:p>
             <a:r>
-              <a:rPr lang="en-US" smtClean="0"/>
+              <a:rPr lang="en-US"/>
               <a:t>Click to edit Master title style</a:t>
             </a:r>
-            <a:endParaRPr lang="en-US"/>
           </a:p>
         </p:txBody>
       </p:sp>
@@ -272,10 +287,9 @@
           </a:lstStyle>
           <a:p>
             <a:r>
-              <a:rPr lang="en-US" smtClean="0"/>
+              <a:rPr lang="en-US"/>
               <a:t>Click to edit Master subtitle style</a:t>
             </a:r>
-            <a:endParaRPr lang="en-US"/>
           </a:p>
         </p:txBody>
       </p:sp>
@@ -296,7 +310,7 @@
           <a:p>
             <a:fld id="{5BCAD085-E8A6-8845-BD4E-CB4CCA059FC4}" type="datetimeFigureOut">
               <a:rPr lang="en-US" smtClean="0"/>
-              <a:t>1/27/13</a:t>
+              <a:t>5/20/2026</a:t>
             </a:fld>
             <a:endParaRPr lang="en-US"/>
           </a:p>
@@ -390,10 +404,9 @@
           <a:lstStyle/>
           <a:p>
             <a:r>
-              <a:rPr lang="en-US" smtClean="0"/>
+              <a:rPr lang="en-US"/>
               <a:t>Click to edit Master title style</a:t>
             </a:r>
-            <a:endParaRPr lang="en-US"/>
           </a:p>
         </p:txBody>
       </p:sp>
@@ -414,38 +427,37 @@
           <a:p>
             <a:pPr lvl="0"/>
             <a:r>
-              <a:rPr lang="en-US" smtClean="0"/>
+              <a:rPr lang="en-US"/>
               <a:t>Click to edit Master text styles</a:t>
             </a:r>
           </a:p>
           <a:p>
             <a:pPr lvl="1"/>
             <a:r>
-              <a:rPr lang="en-US" smtClean="0"/>
+              <a:rPr lang="en-US"/>
               <a:t>Second level</a:t>
             </a:r>
           </a:p>
           <a:p>
             <a:pPr lvl="2"/>
             <a:r>
-              <a:rPr lang="en-US" smtClean="0"/>
+              <a:rPr lang="en-US"/>
               <a:t>Third level</a:t>
             </a:r>
           </a:p>
           <a:p>
             <a:pPr lvl="3"/>
             <a:r>
-              <a:rPr lang="en-US" smtClean="0"/>
+              <a:rPr lang="en-US"/>
               <a:t>Fourth level</a:t>
             </a:r>
           </a:p>
           <a:p>
             <a:pPr lvl="4"/>
             <a:r>
-              <a:rPr lang="en-US" smtClean="0"/>
+              <a:rPr lang="en-US"/>
               <a:t>Fifth level</a:t>
             </a:r>
-            <a:endParaRPr lang="en-US"/>
           </a:p>
         </p:txBody>
       </p:sp>
@@ -466,7 +478,7 @@
           <a:p>
             <a:fld id="{5BCAD085-E8A6-8845-BD4E-CB4CCA059FC4}" type="datetimeFigureOut">
               <a:rPr lang="en-US" smtClean="0"/>
-              <a:t>1/27/13</a:t>
+              <a:t>5/20/2026</a:t>
             </a:fld>
             <a:endParaRPr lang="en-US"/>
           </a:p>
@@ -565,10 +577,9 @@
           <a:lstStyle/>
           <a:p>
             <a:r>
-              <a:rPr lang="en-US" smtClean="0"/>
+              <a:rPr lang="en-US"/>
               <a:t>Click to edit Master title style</a:t>
             </a:r>
-            <a:endParaRPr lang="en-US"/>
           </a:p>
         </p:txBody>
       </p:sp>
@@ -594,38 +605,37 @@
           <a:p>
             <a:pPr lvl="0"/>
             <a:r>
-              <a:rPr lang="en-US" smtClean="0"/>
+              <a:rPr lang="en-US"/>
               <a:t>Click to edit Master text styles</a:t>
             </a:r>
           </a:p>
           <a:p>
             <a:pPr lvl="1"/>
             <a:r>
-              <a:rPr lang="en-US" smtClean="0"/>
+              <a:rPr lang="en-US"/>
               <a:t>Second level</a:t>
             </a:r>
           </a:p>
           <a:p>
             <a:pPr lvl="2"/>
             <a:r>
-              <a:rPr lang="en-US" smtClean="0"/>
+              <a:rPr lang="en-US"/>
               <a:t>Third level</a:t>
             </a:r>
           </a:p>
           <a:p>
             <a:pPr lvl="3"/>
             <a:r>
-              <a:rPr lang="en-US" smtClean="0"/>
+              <a:rPr lang="en-US"/>
               <a:t>Fourth level</a:t>
             </a:r>
           </a:p>
           <a:p>
             <a:pPr lvl="4"/>
             <a:r>
-              <a:rPr lang="en-US" smtClean="0"/>
+              <a:rPr lang="en-US"/>
               <a:t>Fifth level</a:t>
             </a:r>
-            <a:endParaRPr lang="en-US"/>
           </a:p>
         </p:txBody>
       </p:sp>
@@ -646,7 +656,7 @@
           <a:p>
             <a:fld id="{5BCAD085-E8A6-8845-BD4E-CB4CCA059FC4}" type="datetimeFigureOut">
               <a:rPr lang="en-US" smtClean="0"/>
-              <a:t>1/27/13</a:t>
+              <a:t>5/20/2026</a:t>
             </a:fld>
             <a:endParaRPr lang="en-US"/>
           </a:p>
@@ -740,10 +750,9 @@
           <a:lstStyle/>
           <a:p>
             <a:r>
-              <a:rPr lang="en-US" smtClean="0"/>
+              <a:rPr lang="en-US"/>
               <a:t>Click to edit Master title style</a:t>
             </a:r>
-            <a:endParaRPr lang="en-US"/>
           </a:p>
         </p:txBody>
       </p:sp>
@@ -764,38 +773,37 @@
           <a:p>
             <a:pPr lvl="0"/>
             <a:r>
-              <a:rPr lang="en-US" smtClean="0"/>
+              <a:rPr lang="en-US"/>
               <a:t>Click to edit Master text styles</a:t>
             </a:r>
           </a:p>
           <a:p>
             <a:pPr lvl="1"/>
             <a:r>
-              <a:rPr lang="en-US" smtClean="0"/>
+              <a:rPr lang="en-US"/>
               <a:t>Second level</a:t>
             </a:r>
           </a:p>
           <a:p>
             <a:pPr lvl="2"/>
             <a:r>
-              <a:rPr lang="en-US" smtClean="0"/>
+              <a:rPr lang="en-US"/>
               <a:t>Third level</a:t>
             </a:r>
           </a:p>
           <a:p>
             <a:pPr lvl="3"/>
             <a:r>
-              <a:rPr lang="en-US" smtClean="0"/>
+              <a:rPr lang="en-US"/>
               <a:t>Fourth level</a:t>
             </a:r>
           </a:p>
           <a:p>
             <a:pPr lvl="4"/>
             <a:r>
-              <a:rPr lang="en-US" smtClean="0"/>
+              <a:rPr lang="en-US"/>
               <a:t>Fifth level</a:t>
             </a:r>
-            <a:endParaRPr lang="en-US"/>
           </a:p>
         </p:txBody>
       </p:sp>
@@ -816,7 +824,7 @@
           <a:p>
             <a:fld id="{5BCAD085-E8A6-8845-BD4E-CB4CCA059FC4}" type="datetimeFigureOut">
               <a:rPr lang="en-US" smtClean="0"/>
-              <a:t>1/27/13</a:t>
+              <a:t>5/20/2026</a:t>
             </a:fld>
             <a:endParaRPr lang="en-US"/>
           </a:p>
@@ -919,10 +927,9 @@
           </a:lstStyle>
           <a:p>
             <a:r>
-              <a:rPr lang="en-US" smtClean="0"/>
+              <a:rPr lang="en-US"/>
               <a:t>Click to edit Master title style</a:t>
             </a:r>
-            <a:endParaRPr lang="en-US"/>
           </a:p>
         </p:txBody>
       </p:sp>
@@ -1039,7 +1046,7 @@
           <a:p>
             <a:pPr lvl="0"/>
             <a:r>
-              <a:rPr lang="en-US" smtClean="0"/>
+              <a:rPr lang="en-US"/>
               <a:t>Click to edit Master text styles</a:t>
             </a:r>
           </a:p>
@@ -1062,7 +1069,7 @@
           <a:p>
             <a:fld id="{5BCAD085-E8A6-8845-BD4E-CB4CCA059FC4}" type="datetimeFigureOut">
               <a:rPr lang="en-US" smtClean="0"/>
-              <a:t>1/27/13</a:t>
+              <a:t>5/20/2026</a:t>
             </a:fld>
             <a:endParaRPr lang="en-US"/>
           </a:p>
@@ -1156,10 +1163,9 @@
           <a:lstStyle/>
           <a:p>
             <a:r>
-              <a:rPr lang="en-US" smtClean="0"/>
+              <a:rPr lang="en-US"/>
               <a:t>Click to edit Master title style</a:t>
             </a:r>
-            <a:endParaRPr lang="en-US"/>
           </a:p>
         </p:txBody>
       </p:sp>
@@ -1213,38 +1219,37 @@
           <a:p>
             <a:pPr lvl="0"/>
             <a:r>
-              <a:rPr lang="en-US" smtClean="0"/>
+              <a:rPr lang="en-US"/>
               <a:t>Click to edit Master text styles</a:t>
             </a:r>
           </a:p>
           <a:p>
             <a:pPr lvl="1"/>
             <a:r>
-              <a:rPr lang="en-US" smtClean="0"/>
+              <a:rPr lang="en-US"/>
               <a:t>Second level</a:t>
             </a:r>
           </a:p>
           <a:p>
             <a:pPr lvl="2"/>
             <a:r>
-              <a:rPr lang="en-US" smtClean="0"/>
+              <a:rPr lang="en-US"/>
               <a:t>Third level</a:t>
             </a:r>
           </a:p>
           <a:p>
             <a:pPr lvl="3"/>
             <a:r>
-              <a:rPr lang="en-US" smtClean="0"/>
+              <a:rPr lang="en-US"/>
               <a:t>Fourth level</a:t>
             </a:r>
           </a:p>
           <a:p>
             <a:pPr lvl="4"/>
             <a:r>
-              <a:rPr lang="en-US" smtClean="0"/>
+              <a:rPr lang="en-US"/>
               <a:t>Fifth level</a:t>
             </a:r>
-            <a:endParaRPr lang="en-US"/>
           </a:p>
         </p:txBody>
       </p:sp>
@@ -1298,38 +1303,37 @@
           <a:p>
             <a:pPr lvl="0"/>
             <a:r>
-              <a:rPr lang="en-US" smtClean="0"/>
+              <a:rPr lang="en-US"/>
               <a:t>Click to edit Master text styles</a:t>
             </a:r>
           </a:p>
           <a:p>
             <a:pPr lvl="1"/>
             <a:r>
-              <a:rPr lang="en-US" smtClean="0"/>
+              <a:rPr lang="en-US"/>
               <a:t>Second level</a:t>
             </a:r>
           </a:p>
           <a:p>
             <a:pPr lvl="2"/>
             <a:r>
-              <a:rPr lang="en-US" smtClean="0"/>
+              <a:rPr lang="en-US"/>
               <a:t>Third level</a:t>
             </a:r>
           </a:p>
           <a:p>
             <a:pPr lvl="3"/>
             <a:r>
-              <a:rPr lang="en-US" smtClean="0"/>
+              <a:rPr lang="en-US"/>
               <a:t>Fourth level</a:t>
             </a:r>
           </a:p>
           <a:p>
             <a:pPr lvl="4"/>
             <a:r>
-              <a:rPr lang="en-US" smtClean="0"/>
+              <a:rPr lang="en-US"/>
               <a:t>Fifth level</a:t>
             </a:r>
-            <a:endParaRPr lang="en-US"/>
           </a:p>
         </p:txBody>
       </p:sp>
@@ -1350,7 +1354,7 @@
           <a:p>
             <a:fld id="{5BCAD085-E8A6-8845-BD4E-CB4CCA059FC4}" type="datetimeFigureOut">
               <a:rPr lang="en-US" smtClean="0"/>
-              <a:t>1/27/13</a:t>
+              <a:t>5/20/2026</a:t>
             </a:fld>
             <a:endParaRPr lang="en-US"/>
           </a:p>
@@ -1448,10 +1452,9 @@
           </a:lstStyle>
           <a:p>
             <a:r>
-              <a:rPr lang="en-US" smtClean="0"/>
+              <a:rPr lang="en-US"/>
               <a:t>Click to edit Master title style</a:t>
             </a:r>
-            <a:endParaRPr lang="en-US"/>
           </a:p>
         </p:txBody>
       </p:sp>
@@ -1514,7 +1517,7 @@
           <a:p>
             <a:pPr lvl="0"/>
             <a:r>
-              <a:rPr lang="en-US" smtClean="0"/>
+              <a:rPr lang="en-US"/>
               <a:t>Click to edit Master text styles</a:t>
             </a:r>
           </a:p>
@@ -1570,38 +1573,37 @@
           <a:p>
             <a:pPr lvl="0"/>
             <a:r>
-              <a:rPr lang="en-US" smtClean="0"/>
+              <a:rPr lang="en-US"/>
               <a:t>Click to edit Master text styles</a:t>
             </a:r>
           </a:p>
           <a:p>
             <a:pPr lvl="1"/>
             <a:r>
-              <a:rPr lang="en-US" smtClean="0"/>
+              <a:rPr lang="en-US"/>
               <a:t>Second level</a:t>
             </a:r>
           </a:p>
           <a:p>
             <a:pPr lvl="2"/>
             <a:r>
-              <a:rPr lang="en-US" smtClean="0"/>
+              <a:rPr lang="en-US"/>
               <a:t>Third level</a:t>
             </a:r>
           </a:p>
           <a:p>
             <a:pPr lvl="3"/>
             <a:r>
-              <a:rPr lang="en-US" smtClean="0"/>
+              <a:rPr lang="en-US"/>
               <a:t>Fourth level</a:t>
             </a:r>
           </a:p>
           <a:p>
             <a:pPr lvl="4"/>
             <a:r>
-              <a:rPr lang="en-US" smtClean="0"/>
+              <a:rPr lang="en-US"/>
               <a:t>Fifth level</a:t>
             </a:r>
-            <a:endParaRPr lang="en-US"/>
           </a:p>
         </p:txBody>
       </p:sp>
@@ -1664,7 +1666,7 @@
           <a:p>
             <a:pPr lvl="0"/>
             <a:r>
-              <a:rPr lang="en-US" smtClean="0"/>
+              <a:rPr lang="en-US"/>
               <a:t>Click to edit Master text styles</a:t>
             </a:r>
           </a:p>
@@ -1720,38 +1722,37 @@
           <a:p>
             <a:pPr lvl="0"/>
             <a:r>
-              <a:rPr lang="en-US" smtClean="0"/>
+              <a:rPr lang="en-US"/>
               <a:t>Click to edit Master text styles</a:t>
             </a:r>
           </a:p>
           <a:p>
             <a:pPr lvl="1"/>
             <a:r>
-              <a:rPr lang="en-US" smtClean="0"/>
+              <a:rPr lang="en-US"/>
               <a:t>Second level</a:t>
             </a:r>
           </a:p>
           <a:p>
             <a:pPr lvl="2"/>
             <a:r>
-              <a:rPr lang="en-US" smtClean="0"/>
+              <a:rPr lang="en-US"/>
               <a:t>Third level</a:t>
             </a:r>
           </a:p>
           <a:p>
             <a:pPr lvl="3"/>
             <a:r>
-              <a:rPr lang="en-US" smtClean="0"/>
+              <a:rPr lang="en-US"/>
               <a:t>Fourth level</a:t>
             </a:r>
           </a:p>
           <a:p>
             <a:pPr lvl="4"/>
             <a:r>
-              <a:rPr lang="en-US" smtClean="0"/>
+              <a:rPr lang="en-US"/>
               <a:t>Fifth level</a:t>
             </a:r>
-            <a:endParaRPr lang="en-US"/>
           </a:p>
         </p:txBody>
       </p:sp>
@@ -1772,7 +1773,7 @@
           <a:p>
             <a:fld id="{5BCAD085-E8A6-8845-BD4E-CB4CCA059FC4}" type="datetimeFigureOut">
               <a:rPr lang="en-US" smtClean="0"/>
-              <a:t>1/27/13</a:t>
+              <a:t>5/20/2026</a:t>
             </a:fld>
             <a:endParaRPr lang="en-US"/>
           </a:p>
@@ -1866,10 +1867,9 @@
           <a:lstStyle/>
           <a:p>
             <a:r>
-              <a:rPr lang="en-US" smtClean="0"/>
+              <a:rPr lang="en-US"/>
               <a:t>Click to edit Master title style</a:t>
             </a:r>
-            <a:endParaRPr lang="en-US"/>
           </a:p>
         </p:txBody>
       </p:sp>
@@ -1890,7 +1890,7 @@
           <a:p>
             <a:fld id="{5BCAD085-E8A6-8845-BD4E-CB4CCA059FC4}" type="datetimeFigureOut">
               <a:rPr lang="en-US" smtClean="0"/>
-              <a:t>1/27/13</a:t>
+              <a:t>5/20/2026</a:t>
             </a:fld>
             <a:endParaRPr lang="en-US"/>
           </a:p>
@@ -1985,7 +1985,7 @@
           <a:p>
             <a:fld id="{5BCAD085-E8A6-8845-BD4E-CB4CCA059FC4}" type="datetimeFigureOut">
               <a:rPr lang="en-US" smtClean="0"/>
-              <a:t>1/27/13</a:t>
+              <a:t>5/20/2026</a:t>
             </a:fld>
             <a:endParaRPr lang="en-US"/>
           </a:p>
@@ -2088,10 +2088,9 @@
           </a:lstStyle>
           <a:p>
             <a:r>
-              <a:rPr lang="en-US" smtClean="0"/>
+              <a:rPr lang="en-US"/>
               <a:t>Click to edit Master title style</a:t>
             </a:r>
-            <a:endParaRPr lang="en-US"/>
           </a:p>
         </p:txBody>
       </p:sp>
@@ -2145,38 +2144,37 @@
           <a:p>
             <a:pPr lvl="0"/>
             <a:r>
-              <a:rPr lang="en-US" smtClean="0"/>
+              <a:rPr lang="en-US"/>
               <a:t>Click to edit Master text styles</a:t>
             </a:r>
           </a:p>
           <a:p>
             <a:pPr lvl="1"/>
             <a:r>
-              <a:rPr lang="en-US" smtClean="0"/>
+              <a:rPr lang="en-US"/>
               <a:t>Second level</a:t>
             </a:r>
           </a:p>
           <a:p>
             <a:pPr lvl="2"/>
             <a:r>
-              <a:rPr lang="en-US" smtClean="0"/>
+              <a:rPr lang="en-US"/>
               <a:t>Third level</a:t>
             </a:r>
           </a:p>
           <a:p>
             <a:pPr lvl="3"/>
             <a:r>
-              <a:rPr lang="en-US" smtClean="0"/>
+              <a:rPr lang="en-US"/>
               <a:t>Fourth level</a:t>
             </a:r>
           </a:p>
           <a:p>
             <a:pPr lvl="4"/>
             <a:r>
-              <a:rPr lang="en-US" smtClean="0"/>
+              <a:rPr lang="en-US"/>
               <a:t>Fifth level</a:t>
             </a:r>
-            <a:endParaRPr lang="en-US"/>
           </a:p>
         </p:txBody>
       </p:sp>
@@ -2239,7 +2237,7 @@
           <a:p>
             <a:pPr lvl="0"/>
             <a:r>
-              <a:rPr lang="en-US" smtClean="0"/>
+              <a:rPr lang="en-US"/>
               <a:t>Click to edit Master text styles</a:t>
             </a:r>
           </a:p>
@@ -2262,7 +2260,7 @@
           <a:p>
             <a:fld id="{5BCAD085-E8A6-8845-BD4E-CB4CCA059FC4}" type="datetimeFigureOut">
               <a:rPr lang="en-US" smtClean="0"/>
-              <a:t>1/27/13</a:t>
+              <a:t>5/20/2026</a:t>
             </a:fld>
             <a:endParaRPr lang="en-US"/>
           </a:p>
@@ -2365,10 +2363,9 @@
           </a:lstStyle>
           <a:p>
             <a:r>
-              <a:rPr lang="en-US" smtClean="0"/>
+              <a:rPr lang="en-US"/>
               <a:t>Click to edit Master title style</a:t>
             </a:r>
-            <a:endParaRPr lang="en-US"/>
           </a:p>
         </p:txBody>
       </p:sp>
@@ -2492,7 +2489,7 @@
           <a:p>
             <a:pPr lvl="0"/>
             <a:r>
-              <a:rPr lang="en-US" smtClean="0"/>
+              <a:rPr lang="en-US"/>
               <a:t>Click to edit Master text styles</a:t>
             </a:r>
           </a:p>
@@ -2515,7 +2512,7 @@
           <a:p>
             <a:fld id="{5BCAD085-E8A6-8845-BD4E-CB4CCA059FC4}" type="datetimeFigureOut">
               <a:rPr lang="en-US" smtClean="0"/>
-              <a:t>1/27/13</a:t>
+              <a:t>5/20/2026</a:t>
             </a:fld>
             <a:endParaRPr lang="en-US"/>
           </a:p>
@@ -2624,10 +2621,9 @@
           <a:lstStyle/>
           <a:p>
             <a:r>
-              <a:rPr lang="en-US" smtClean="0"/>
+              <a:rPr lang="en-US"/>
               <a:t>Click to edit Master title style</a:t>
             </a:r>
-            <a:endParaRPr lang="en-US"/>
           </a:p>
         </p:txBody>
       </p:sp>
@@ -2658,38 +2654,37 @@
           <a:p>
             <a:pPr lvl="0"/>
             <a:r>
-              <a:rPr lang="en-US" smtClean="0"/>
+              <a:rPr lang="en-US"/>
               <a:t>Click to edit Master text styles</a:t>
             </a:r>
           </a:p>
           <a:p>
             <a:pPr lvl="1"/>
             <a:r>
-              <a:rPr lang="en-US" smtClean="0"/>
+              <a:rPr lang="en-US"/>
               <a:t>Second level</a:t>
             </a:r>
           </a:p>
           <a:p>
             <a:pPr lvl="2"/>
             <a:r>
-              <a:rPr lang="en-US" smtClean="0"/>
+              <a:rPr lang="en-US"/>
               <a:t>Third level</a:t>
             </a:r>
           </a:p>
           <a:p>
             <a:pPr lvl="3"/>
             <a:r>
-              <a:rPr lang="en-US" smtClean="0"/>
+              <a:rPr lang="en-US"/>
               <a:t>Fourth level</a:t>
             </a:r>
           </a:p>
           <a:p>
             <a:pPr lvl="4"/>
             <a:r>
-              <a:rPr lang="en-US" smtClean="0"/>
+              <a:rPr lang="en-US"/>
               <a:t>Fifth level</a:t>
             </a:r>
-            <a:endParaRPr lang="en-US"/>
           </a:p>
         </p:txBody>
       </p:sp>
@@ -2728,7 +2723,7 @@
           <a:p>
             <a:fld id="{5BCAD085-E8A6-8845-BD4E-CB4CCA059FC4}" type="datetimeFigureOut">
               <a:rPr lang="en-US" smtClean="0"/>
-              <a:t>1/27/13</a:t>
+              <a:t>5/20/2026</a:t>
             </a:fld>
             <a:endParaRPr lang="en-US"/>
           </a:p>
@@ -3087,7 +3082,7 @@
 </file>
 
 <file path=ppt/slides/slide1.xml><?xml version="1.0" encoding="utf-8"?>
-<p:sld xmlns:a="http://schemas.openxmlformats.org/drawingml/2006/main" xmlns:p="http://schemas.openxmlformats.org/presentationml/2006/main" xmlns:r="http://schemas.openxmlformats.org/officeDocument/2006/relationships">
+<p:sld xmlns:a="http://schemas.openxmlformats.org/drawingml/2006/main" xmlns:r="http://schemas.openxmlformats.org/officeDocument/2006/relationships" xmlns:p="http://schemas.openxmlformats.org/presentationml/2006/main">
   <p:cSld>
     <p:spTree>
       <p:nvGrpSpPr>
@@ -3095,7 +3090,14 @@
         <p:cNvGrpSpPr/>
         <p:nvPr/>
       </p:nvGrpSpPr>
-      <p:grpSpPr/>
+      <p:grpSpPr>
+        <a:xfrm>
+          <a:off x="0" y="0"/>
+          <a:ext cx="0" cy="0"/>
+          <a:chOff x="0" y="0"/>
+          <a:chExt cx="0" cy="0"/>
+        </a:xfrm>
+      </p:grpSpPr>
       <p:sp>
         <p:nvSpPr>
           <p:cNvPr id="2" name="Rectangle 1"/>
@@ -3137,6 +3139,7 @@
           <a:lstStyle/>
           <a:p>
             <a:pPr algn="ctr"/>
+            <a:endParaRPr/>
           </a:p>
         </p:txBody>
       </p:sp>
@@ -3180,6 +3183,7 @@
           <a:lstStyle/>
           <a:p>
             <a:pPr algn="ctr"/>
+            <a:endParaRPr/>
           </a:p>
         </p:txBody>
       </p:sp>
@@ -3223,6 +3227,7 @@
           <a:lstStyle/>
           <a:p>
             <a:pPr algn="ctr"/>
+            <a:endParaRPr/>
           </a:p>
         </p:txBody>
       </p:sp>
@@ -3266,6 +3271,7 @@
           <a:lstStyle/>
           <a:p>
             <a:pPr algn="ctr"/>
+            <a:endParaRPr/>
           </a:p>
         </p:txBody>
       </p:sp>
@@ -3286,7 +3292,7 @@
           <a:noFill/>
         </p:spPr>
         <p:txBody>
-          <a:bodyPr wrap="square" lIns="0" rIns="0" tIns="0" bIns="0">
+          <a:bodyPr wrap="square" lIns="0" tIns="0" rIns="0" bIns="0">
             <a:spAutoFit/>
           </a:bodyPr>
           <a:lstStyle/>
@@ -3321,7 +3327,7 @@
           <a:noFill/>
         </p:spPr>
         <p:txBody>
-          <a:bodyPr wrap="square" lIns="0" rIns="0" tIns="0" bIns="0">
+          <a:bodyPr wrap="square" lIns="0" tIns="0" rIns="0" bIns="0">
             <a:spAutoFit/>
           </a:bodyPr>
           <a:lstStyle/>
@@ -3356,7 +3362,7 @@
           <a:noFill/>
         </p:spPr>
         <p:txBody>
-          <a:bodyPr wrap="square" lIns="0" rIns="0" tIns="0" bIns="0">
+          <a:bodyPr wrap="square" lIns="0" tIns="0" rIns="0" bIns="0">
             <a:spAutoFit/>
           </a:bodyPr>
           <a:lstStyle/>
@@ -3415,7 +3421,7 @@
           <a:noFill/>
         </p:spPr>
         <p:txBody>
-          <a:bodyPr wrap="square" lIns="0" rIns="0" tIns="0" bIns="0">
+          <a:bodyPr wrap="square" lIns="0" tIns="0" rIns="0" bIns="0">
             <a:spAutoFit/>
           </a:bodyPr>
           <a:lstStyle/>
@@ -3450,7 +3456,7 @@
           <a:noFill/>
         </p:spPr>
         <p:txBody>
-          <a:bodyPr wrap="square" lIns="0" rIns="0" tIns="0" bIns="0">
+          <a:bodyPr wrap="square" lIns="0" tIns="0" rIns="0" bIns="0">
             <a:spAutoFit/>
           </a:bodyPr>
           <a:lstStyle/>
@@ -3485,7 +3491,7 @@
           <a:noFill/>
         </p:spPr>
         <p:txBody>
-          <a:bodyPr wrap="square" lIns="0" rIns="0" tIns="0" bIns="0">
+          <a:bodyPr wrap="square" lIns="0" tIns="0" rIns="0" bIns="0">
             <a:spAutoFit/>
           </a:bodyPr>
           <a:lstStyle/>
@@ -3520,7 +3526,7 @@
           <a:noFill/>
         </p:spPr>
         <p:txBody>
-          <a:bodyPr wrap="square" lIns="0" rIns="0" tIns="0" bIns="0">
+          <a:bodyPr wrap="square" lIns="0" tIns="0" rIns="0" bIns="0">
             <a:spAutoFit/>
           </a:bodyPr>
           <a:lstStyle/>
@@ -3591,7 +3597,7 @@
           <a:noFill/>
         </p:spPr>
         <p:txBody>
-          <a:bodyPr wrap="square" lIns="0" rIns="0" tIns="0" bIns="0">
+          <a:bodyPr wrap="square" lIns="0" tIns="0" rIns="0" bIns="0">
             <a:spAutoFit/>
           </a:bodyPr>
           <a:lstStyle/>
@@ -3626,7 +3632,7 @@
           <a:noFill/>
         </p:spPr>
         <p:txBody>
-          <a:bodyPr wrap="square" lIns="0" rIns="0" tIns="0" bIns="0">
+          <a:bodyPr wrap="square" lIns="0" tIns="0" rIns="0" bIns="0">
             <a:spAutoFit/>
           </a:bodyPr>
           <a:lstStyle/>
@@ -3663,7 +3669,7 @@
           <a:noFill/>
         </p:spPr>
         <p:txBody>
-          <a:bodyPr wrap="square" lIns="0" rIns="0" tIns="0" bIns="0">
+          <a:bodyPr wrap="square" lIns="0" tIns="0" rIns="0" bIns="0">
             <a:spAutoFit/>
           </a:bodyPr>
           <a:lstStyle/>
@@ -3698,7 +3704,7 @@
           <a:noFill/>
         </p:spPr>
         <p:txBody>
-          <a:bodyPr wrap="square" lIns="0" rIns="0" tIns="0" bIns="0">
+          <a:bodyPr wrap="square" lIns="0" tIns="0" rIns="0" bIns="0">
             <a:spAutoFit/>
           </a:bodyPr>
           <a:lstStyle/>
@@ -3733,7 +3739,7 @@
           <a:noFill/>
         </p:spPr>
         <p:txBody>
-          <a:bodyPr wrap="square" lIns="0" rIns="0" tIns="0" bIns="0">
+          <a:bodyPr wrap="square" lIns="0" tIns="0" rIns="0" bIns="0">
             <a:spAutoFit/>
           </a:bodyPr>
           <a:lstStyle/>
@@ -3760,7 +3766,7 @@
 </file>
 
 <file path=ppt/slides/slide2.xml><?xml version="1.0" encoding="utf-8"?>
-<p:sld xmlns:a="http://schemas.openxmlformats.org/drawingml/2006/main" xmlns:p="http://schemas.openxmlformats.org/presentationml/2006/main" xmlns:r="http://schemas.openxmlformats.org/officeDocument/2006/relationships">
+<p:sld xmlns:a="http://schemas.openxmlformats.org/drawingml/2006/main" xmlns:r="http://schemas.openxmlformats.org/officeDocument/2006/relationships" xmlns:p="http://schemas.openxmlformats.org/presentationml/2006/main">
   <p:cSld>
     <p:spTree>
       <p:nvGrpSpPr>
@@ -3768,7 +3774,14 @@
         <p:cNvGrpSpPr/>
         <p:nvPr/>
       </p:nvGrpSpPr>
-      <p:grpSpPr/>
+      <p:grpSpPr>
+        <a:xfrm>
+          <a:off x="0" y="0"/>
+          <a:ext cx="0" cy="0"/>
+          <a:chOff x="0" y="0"/>
+          <a:chExt cx="0" cy="0"/>
+        </a:xfrm>
+      </p:grpSpPr>
       <p:sp>
         <p:nvSpPr>
           <p:cNvPr id="2" name="Rectangle 1"/>
@@ -3810,6 +3823,7 @@
           <a:lstStyle/>
           <a:p>
             <a:pPr algn="ctr"/>
+            <a:endParaRPr/>
           </a:p>
         </p:txBody>
       </p:sp>
@@ -3853,6 +3867,7 @@
           <a:lstStyle/>
           <a:p>
             <a:pPr algn="ctr"/>
+            <a:endParaRPr/>
           </a:p>
         </p:txBody>
       </p:sp>
@@ -3892,7 +3907,7 @@
           </a:fontRef>
         </p:style>
         <p:txBody>
-          <a:bodyPr rtlCol="0" anchor="ctr" lIns="0" rIns="0" tIns="0" bIns="0"/>
+          <a:bodyPr lIns="0" tIns="0" rIns="0" bIns="0" rtlCol="0" anchor="ctr"/>
           <a:lstStyle/>
           <a:p>
             <a:pPr algn="ctr"/>
@@ -3925,7 +3940,7 @@
           <a:noFill/>
         </p:spPr>
         <p:txBody>
-          <a:bodyPr wrap="square" lIns="0" rIns="0" tIns="0" bIns="0">
+          <a:bodyPr wrap="square" lIns="0" tIns="0" rIns="0" bIns="0">
             <a:spAutoFit/>
           </a:bodyPr>
           <a:lstStyle/>
@@ -3960,7 +3975,7 @@
           <a:noFill/>
         </p:spPr>
         <p:txBody>
-          <a:bodyPr wrap="square" lIns="0" rIns="0" tIns="0" bIns="0">
+          <a:bodyPr wrap="square" lIns="0" tIns="0" rIns="0" bIns="0">
             <a:spAutoFit/>
           </a:bodyPr>
           <a:lstStyle/>
@@ -4030,7 +4045,7 @@
           <a:noFill/>
         </p:spPr>
         <p:txBody>
-          <a:bodyPr wrap="square" lIns="0" rIns="0" tIns="0" bIns="0">
+          <a:bodyPr wrap="square" lIns="0" tIns="0" rIns="0" bIns="0">
             <a:spAutoFit/>
           </a:bodyPr>
           <a:lstStyle/>
@@ -4065,7 +4080,7 @@
           <a:noFill/>
         </p:spPr>
         <p:txBody>
-          <a:bodyPr wrap="square" lIns="0" rIns="0" tIns="0" bIns="0">
+          <a:bodyPr wrap="square" lIns="0" tIns="0" rIns="0" bIns="0">
             <a:spAutoFit/>
           </a:bodyPr>
           <a:lstStyle/>
@@ -4083,6 +4098,15 @@
           </a:p>
           <a:p>
             <a:pPr algn="l"/>
+            <a:endParaRPr sz="1300" b="0" i="0">
+              <a:solidFill>
+                <a:srgbClr val="1B1F2B"/>
+              </a:solidFill>
+              <a:latin typeface="Calibri"/>
+            </a:endParaRPr>
+          </a:p>
+          <a:p>
+            <a:pPr algn="l"/>
             <a:r>
               <a:rPr sz="1300" b="0" i="0">
                 <a:solidFill>
@@ -4090,32 +4114,17 @@
                 </a:solidFill>
                 <a:latin typeface="Calibri"/>
               </a:rPr>
-              <a:t/>
-            </a:r>
-          </a:p>
-          <a:p>
-            <a:pPr algn="l"/>
-            <a:r>
-              <a:rPr sz="1300" b="0" i="0">
-                <a:solidFill>
-                  <a:srgbClr val="1B1F2B"/>
-                </a:solidFill>
-                <a:latin typeface="Calibri"/>
-              </a:rPr>
               <a:t>El hexagrama es el caso m = 6, p = 2  (la estrella mas pequena posible).</a:t>
             </a:r>
           </a:p>
           <a:p>
             <a:pPr algn="l"/>
-            <a:r>
-              <a:rPr sz="1300" b="0" i="0">
-                <a:solidFill>
-                  <a:srgbClr val="1B1F2B"/>
-                </a:solidFill>
-                <a:latin typeface="Calibri"/>
-              </a:rPr>
-              <a:t/>
-            </a:r>
+            <a:endParaRPr sz="1300" b="0" i="0">
+              <a:solidFill>
+                <a:srgbClr val="1B1F2B"/>
+              </a:solidFill>
+              <a:latin typeface="Calibri"/>
+            </a:endParaRPr>
           </a:p>
           <a:p>
             <a:pPr algn="l"/>
@@ -4232,7 +4241,7 @@
           <a:noFill/>
         </p:spPr>
         <p:txBody>
-          <a:bodyPr wrap="square" lIns="0" rIns="0" tIns="0" bIns="0">
+          <a:bodyPr wrap="square" lIns="0" tIns="0" rIns="0" bIns="0">
             <a:spAutoFit/>
           </a:bodyPr>
           <a:lstStyle/>
@@ -4267,7 +4276,7 @@
           <a:noFill/>
         </p:spPr>
         <p:txBody>
-          <a:bodyPr wrap="square" lIns="0" rIns="0" tIns="0" bIns="0">
+          <a:bodyPr wrap="square" lIns="0" tIns="0" rIns="0" bIns="0">
             <a:spAutoFit/>
           </a:bodyPr>
           <a:lstStyle/>
@@ -4294,7 +4303,7 @@
 </file>
 
 <file path=ppt/slides/slide3.xml><?xml version="1.0" encoding="utf-8"?>
-<p:sld xmlns:a="http://schemas.openxmlformats.org/drawingml/2006/main" xmlns:p="http://schemas.openxmlformats.org/presentationml/2006/main" xmlns:r="http://schemas.openxmlformats.org/officeDocument/2006/relationships">
+<p:sld xmlns:a="http://schemas.openxmlformats.org/drawingml/2006/main" xmlns:r="http://schemas.openxmlformats.org/officeDocument/2006/relationships" xmlns:p="http://schemas.openxmlformats.org/presentationml/2006/main">
   <p:cSld>
     <p:spTree>
       <p:nvGrpSpPr>
@@ -4302,7 +4311,14 @@
         <p:cNvGrpSpPr/>
         <p:nvPr/>
       </p:nvGrpSpPr>
-      <p:grpSpPr/>
+      <p:grpSpPr>
+        <a:xfrm>
+          <a:off x="0" y="0"/>
+          <a:ext cx="0" cy="0"/>
+          <a:chOff x="0" y="0"/>
+          <a:chExt cx="0" cy="0"/>
+        </a:xfrm>
+      </p:grpSpPr>
       <p:sp>
         <p:nvSpPr>
           <p:cNvPr id="2" name="Rectangle 1"/>
@@ -4344,6 +4360,7 @@
           <a:lstStyle/>
           <a:p>
             <a:pPr algn="ctr"/>
+            <a:endParaRPr/>
           </a:p>
         </p:txBody>
       </p:sp>
@@ -4387,6 +4404,7 @@
           <a:lstStyle/>
           <a:p>
             <a:pPr algn="ctr"/>
+            <a:endParaRPr/>
           </a:p>
         </p:txBody>
       </p:sp>
@@ -4426,7 +4444,7 @@
           </a:fontRef>
         </p:style>
         <p:txBody>
-          <a:bodyPr rtlCol="0" anchor="ctr" lIns="0" rIns="0" tIns="0" bIns="0"/>
+          <a:bodyPr lIns="0" tIns="0" rIns="0" bIns="0" rtlCol="0" anchor="ctr"/>
           <a:lstStyle/>
           <a:p>
             <a:pPr algn="ctr"/>
@@ -4459,7 +4477,7 @@
           <a:noFill/>
         </p:spPr>
         <p:txBody>
-          <a:bodyPr wrap="square" lIns="0" rIns="0" tIns="0" bIns="0">
+          <a:bodyPr wrap="square" lIns="0" tIns="0" rIns="0" bIns="0">
             <a:spAutoFit/>
           </a:bodyPr>
           <a:lstStyle/>
@@ -4494,7 +4512,7 @@
           <a:noFill/>
         </p:spPr>
         <p:txBody>
-          <a:bodyPr wrap="square" lIns="0" rIns="0" tIns="0" bIns="0">
+          <a:bodyPr wrap="square" lIns="0" tIns="0" rIns="0" bIns="0">
             <a:spAutoFit/>
           </a:bodyPr>
           <a:lstStyle/>
@@ -4591,6 +4609,7 @@
           <a:lstStyle/>
           <a:p>
             <a:pPr algn="ctr"/>
+            <a:endParaRPr/>
           </a:p>
         </p:txBody>
       </p:sp>
@@ -4611,7 +4630,7 @@
           <a:noFill/>
         </p:spPr>
         <p:txBody>
-          <a:bodyPr wrap="square" lIns="0" rIns="0" tIns="0" bIns="0">
+          <a:bodyPr wrap="square" lIns="0" tIns="0" rIns="0" bIns="0">
             <a:spAutoFit/>
           </a:bodyPr>
           <a:lstStyle/>
@@ -4646,7 +4665,7 @@
           <a:noFill/>
         </p:spPr>
         <p:txBody>
-          <a:bodyPr wrap="square" lIns="0" rIns="0" tIns="0" bIns="0">
+          <a:bodyPr wrap="square" lIns="0" tIns="0" rIns="0" bIns="0">
             <a:spAutoFit/>
           </a:bodyPr>
           <a:lstStyle/>
@@ -4735,7 +4754,7 @@
           <a:noFill/>
         </p:spPr>
         <p:txBody>
-          <a:bodyPr wrap="square" lIns="0" rIns="0" tIns="0" bIns="0">
+          <a:bodyPr wrap="square" lIns="0" tIns="0" rIns="0" bIns="0">
             <a:spAutoFit/>
           </a:bodyPr>
           <a:lstStyle/>
@@ -4748,16 +4767,7 @@
                 </a:solidFill>
                 <a:latin typeface="Cambria"/>
               </a:rPr>
-              <a:t>n  ∈  {1, 2, ..., 20}      </a:t>
-            </a:r>
-            <a:r>
-              <a:rPr sz="1500" b="0" i="0">
-                <a:solidFill>
-                  <a:srgbClr val="1B1F2B"/>
-                </a:solidFill>
-                <a:latin typeface="Cambria"/>
-              </a:rPr>
-              <a:t>c  ∈  {1, 2, ..., 12}</a:t>
+              <a:t>n  ∈  {1, 2, ..., 20}      c  ∈  {1, 2, ..., 12}</a:t>
             </a:r>
           </a:p>
         </p:txBody>
@@ -4804,6 +4814,7 @@
           <a:lstStyle/>
           <a:p>
             <a:pPr algn="ctr"/>
+            <a:endParaRPr/>
           </a:p>
         </p:txBody>
       </p:sp>
@@ -4824,7 +4835,7 @@
           <a:noFill/>
         </p:spPr>
         <p:txBody>
-          <a:bodyPr wrap="square" lIns="0" rIns="0" tIns="0" bIns="0">
+          <a:bodyPr wrap="square" lIns="0" tIns="0" rIns="0" bIns="0">
             <a:spAutoFit/>
           </a:bodyPr>
           <a:lstStyle/>
@@ -4859,7 +4870,7 @@
           <a:noFill/>
         </p:spPr>
         <p:txBody>
-          <a:bodyPr wrap="square" lIns="0" rIns="0" tIns="0" bIns="0">
+          <a:bodyPr wrap="square" lIns="0" tIns="0" rIns="0" bIns="0">
             <a:spAutoFit/>
           </a:bodyPr>
           <a:lstStyle/>
@@ -4894,7 +4905,7 @@
           <a:noFill/>
         </p:spPr>
         <p:txBody>
-          <a:bodyPr wrap="square" lIns="0" rIns="0" tIns="0" bIns="0">
+          <a:bodyPr wrap="square" lIns="0" tIns="0" rIns="0" bIns="0">
             <a:spAutoFit/>
           </a:bodyPr>
           <a:lstStyle/>
@@ -4929,7 +4940,7 @@
           <a:noFill/>
         </p:spPr>
         <p:txBody>
-          <a:bodyPr wrap="square" lIns="0" rIns="0" tIns="0" bIns="0">
+          <a:bodyPr wrap="square" lIns="0" tIns="0" rIns="0" bIns="0">
             <a:spAutoFit/>
           </a:bodyPr>
           <a:lstStyle/>
@@ -4964,7 +4975,7 @@
           <a:noFill/>
         </p:spPr>
         <p:txBody>
-          <a:bodyPr wrap="square" lIns="0" rIns="0" tIns="0" bIns="0">
+          <a:bodyPr wrap="square" lIns="0" tIns="0" rIns="0" bIns="0">
             <a:spAutoFit/>
           </a:bodyPr>
           <a:lstStyle/>
@@ -5035,7 +5046,7 @@
           <a:noFill/>
         </p:spPr>
         <p:txBody>
-          <a:bodyPr wrap="square" lIns="0" rIns="0" tIns="0" bIns="0">
+          <a:bodyPr wrap="square" lIns="0" tIns="0" rIns="0" bIns="0">
             <a:spAutoFit/>
           </a:bodyPr>
           <a:lstStyle/>
@@ -5062,7 +5073,7 @@
 </file>
 
 <file path=ppt/slides/slide4.xml><?xml version="1.0" encoding="utf-8"?>
-<p:sld xmlns:a="http://schemas.openxmlformats.org/drawingml/2006/main" xmlns:p="http://schemas.openxmlformats.org/presentationml/2006/main" xmlns:r="http://schemas.openxmlformats.org/officeDocument/2006/relationships">
+<p:sld xmlns:a="http://schemas.openxmlformats.org/drawingml/2006/main" xmlns:r="http://schemas.openxmlformats.org/officeDocument/2006/relationships" xmlns:p="http://schemas.openxmlformats.org/presentationml/2006/main">
   <p:cSld>
     <p:spTree>
       <p:nvGrpSpPr>
@@ -5070,7 +5081,14 @@
         <p:cNvGrpSpPr/>
         <p:nvPr/>
       </p:nvGrpSpPr>
-      <p:grpSpPr/>
+      <p:grpSpPr>
+        <a:xfrm>
+          <a:off x="0" y="0"/>
+          <a:ext cx="0" cy="0"/>
+          <a:chOff x="0" y="0"/>
+          <a:chExt cx="0" cy="0"/>
+        </a:xfrm>
+      </p:grpSpPr>
       <p:sp>
         <p:nvSpPr>
           <p:cNvPr id="2" name="Rectangle 1"/>
@@ -5112,6 +5130,7 @@
           <a:lstStyle/>
           <a:p>
             <a:pPr algn="ctr"/>
+            <a:endParaRPr/>
           </a:p>
         </p:txBody>
       </p:sp>
@@ -5155,6 +5174,7 @@
           <a:lstStyle/>
           <a:p>
             <a:pPr algn="ctr"/>
+            <a:endParaRPr/>
           </a:p>
         </p:txBody>
       </p:sp>
@@ -5194,7 +5214,7 @@
           </a:fontRef>
         </p:style>
         <p:txBody>
-          <a:bodyPr rtlCol="0" anchor="ctr" lIns="0" rIns="0" tIns="0" bIns="0"/>
+          <a:bodyPr lIns="0" tIns="0" rIns="0" bIns="0" rtlCol="0" anchor="ctr"/>
           <a:lstStyle/>
           <a:p>
             <a:pPr algn="ctr"/>
@@ -5227,7 +5247,7 @@
           <a:noFill/>
         </p:spPr>
         <p:txBody>
-          <a:bodyPr wrap="square" lIns="0" rIns="0" tIns="0" bIns="0">
+          <a:bodyPr wrap="square" lIns="0" tIns="0" rIns="0" bIns="0">
             <a:spAutoFit/>
           </a:bodyPr>
           <a:lstStyle/>
@@ -5262,7 +5282,7 @@
           <a:noFill/>
         </p:spPr>
         <p:txBody>
-          <a:bodyPr wrap="square" lIns="0" rIns="0" tIns="0" bIns="0">
+          <a:bodyPr wrap="square" lIns="0" tIns="0" rIns="0" bIns="0">
             <a:spAutoFit/>
           </a:bodyPr>
           <a:lstStyle/>
@@ -5332,7 +5352,7 @@
           <a:noFill/>
         </p:spPr>
         <p:txBody>
-          <a:bodyPr wrap="square" lIns="0" rIns="0" tIns="0" bIns="0">
+          <a:bodyPr wrap="square" lIns="0" tIns="0" rIns="0" bIns="0">
             <a:spAutoFit/>
           </a:bodyPr>
           <a:lstStyle/>
@@ -5367,7 +5387,7 @@
           <a:noFill/>
         </p:spPr>
         <p:txBody>
-          <a:bodyPr wrap="square" lIns="0" rIns="0" tIns="0" bIns="0">
+          <a:bodyPr wrap="square" lIns="0" tIns="0" rIns="0" bIns="0">
             <a:spAutoFit/>
           </a:bodyPr>
           <a:lstStyle/>
@@ -5380,52 +5400,7 @@
                 </a:solidFill>
                 <a:latin typeface="Consolas"/>
               </a:rPr>
-              <a:t>l₁={1,3,6,8}   </a:t>
-            </a:r>
-            <a:r>
-              <a:rPr sz="1200" b="0" i="0">
-                <a:solidFill>
-                  <a:srgbClr val="1B1F2B"/>
-                </a:solidFill>
-                <a:latin typeface="Consolas"/>
-              </a:rPr>
-              <a:t>l₂={1,4,7,11}   </a:t>
-            </a:r>
-            <a:r>
-              <a:rPr sz="1200" b="0" i="0">
-                <a:solidFill>
-                  <a:srgbClr val="1B1F2B"/>
-                </a:solidFill>
-                <a:latin typeface="Consolas"/>
-              </a:rPr>
-              <a:t>l₃={8,9,10,11}   </a:t>
-            </a:r>
-            <a:r>
-              <a:rPr sz="1200" b="0" i="0">
-                <a:solidFill>
-                  <a:srgbClr val="1B1F2B"/>
-                </a:solidFill>
-                <a:latin typeface="Consolas"/>
-              </a:rPr>
-              <a:t>l₄={2,3,4,5}   </a:t>
-            </a:r>
-            <a:r>
-              <a:rPr sz="1200" b="0" i="0">
-                <a:solidFill>
-                  <a:srgbClr val="1B1F2B"/>
-                </a:solidFill>
-                <a:latin typeface="Consolas"/>
-              </a:rPr>
-              <a:t>l₅={2,6,9,12}   </a:t>
-            </a:r>
-            <a:r>
-              <a:rPr sz="1200" b="0" i="0">
-                <a:solidFill>
-                  <a:srgbClr val="1B1F2B"/>
-                </a:solidFill>
-                <a:latin typeface="Consolas"/>
-              </a:rPr>
-              <a:t>l₆={5,7,10,12}</a:t>
+              <a:t>l₁={1,3,6,8}   l₂={1,4,7,11}   l₃={8,9,10,11}   l₄={2,3,4,5}   l₅={2,6,9,12}   l₆={5,7,10,12}</a:t>
             </a:r>
           </a:p>
         </p:txBody>
@@ -5474,6 +5449,7 @@
           <a:lstStyle/>
           <a:p>
             <a:pPr algn="ctr"/>
+            <a:endParaRPr/>
           </a:p>
         </p:txBody>
       </p:sp>
@@ -5513,7 +5489,7 @@
           </a:fontRef>
         </p:style>
         <p:txBody>
-          <a:bodyPr rtlCol="0" anchor="ctr" lIns="0" rIns="0" tIns="0" bIns="0"/>
+          <a:bodyPr lIns="0" tIns="0" rIns="0" bIns="0" rtlCol="0" anchor="ctr"/>
           <a:lstStyle/>
           <a:p>
             <a:pPr algn="ctr"/>
@@ -5545,7 +5521,7 @@
           <a:noFill/>
         </p:spPr>
         <p:txBody>
-          <a:bodyPr wrap="square" lIns="0" rIns="0" tIns="0" bIns="0">
+          <a:bodyPr wrap="square" lIns="0" tIns="0" rIns="0" bIns="0">
             <a:spAutoFit/>
           </a:bodyPr>
           <a:lstStyle/>
@@ -5580,7 +5556,7 @@
           <a:noFill/>
         </p:spPr>
         <p:txBody>
-          <a:bodyPr wrap="square" lIns="0" rIns="0" tIns="0" bIns="0">
+          <a:bodyPr wrap="square" lIns="0" tIns="0" rIns="0" bIns="0">
             <a:spAutoFit/>
           </a:bodyPr>
           <a:lstStyle/>
@@ -5615,7 +5591,7 @@
           <a:noFill/>
         </p:spPr>
         <p:txBody>
-          <a:bodyPr wrap="square" lIns="0" rIns="0" tIns="0" bIns="0">
+          <a:bodyPr wrap="square" lIns="0" tIns="0" rIns="0" bIns="0">
             <a:spAutoFit/>
           </a:bodyPr>
           <a:lstStyle/>
@@ -5677,6 +5653,7 @@
           <a:lstStyle/>
           <a:p>
             <a:pPr algn="ctr"/>
+            <a:endParaRPr/>
           </a:p>
         </p:txBody>
       </p:sp>
@@ -5716,7 +5693,7 @@
           </a:fontRef>
         </p:style>
         <p:txBody>
-          <a:bodyPr rtlCol="0" anchor="ctr" lIns="0" rIns="0" tIns="0" bIns="0"/>
+          <a:bodyPr lIns="0" tIns="0" rIns="0" bIns="0" rtlCol="0" anchor="ctr"/>
           <a:lstStyle/>
           <a:p>
             <a:pPr algn="ctr"/>
@@ -5748,7 +5725,7 @@
           <a:noFill/>
         </p:spPr>
         <p:txBody>
-          <a:bodyPr wrap="square" lIns="0" rIns="0" tIns="0" bIns="0">
+          <a:bodyPr wrap="square" lIns="0" tIns="0" rIns="0" bIns="0">
             <a:spAutoFit/>
           </a:bodyPr>
           <a:lstStyle/>
@@ -5783,7 +5760,7 @@
           <a:noFill/>
         </p:spPr>
         <p:txBody>
-          <a:bodyPr wrap="square" lIns="0" rIns="0" tIns="0" bIns="0">
+          <a:bodyPr wrap="square" lIns="0" tIns="0" rIns="0" bIns="0">
             <a:spAutoFit/>
           </a:bodyPr>
           <a:lstStyle/>
@@ -5818,7 +5795,7 @@
           <a:noFill/>
         </p:spPr>
         <p:txBody>
-          <a:bodyPr wrap="square" lIns="0" rIns="0" tIns="0" bIns="0">
+          <a:bodyPr wrap="square" lIns="0" tIns="0" rIns="0" bIns="0">
             <a:spAutoFit/>
           </a:bodyPr>
           <a:lstStyle/>
@@ -5880,6 +5857,7 @@
           <a:lstStyle/>
           <a:p>
             <a:pPr algn="ctr"/>
+            <a:endParaRPr/>
           </a:p>
         </p:txBody>
       </p:sp>
@@ -5919,7 +5897,7 @@
           </a:fontRef>
         </p:style>
         <p:txBody>
-          <a:bodyPr rtlCol="0" anchor="ctr" lIns="0" rIns="0" tIns="0" bIns="0"/>
+          <a:bodyPr lIns="0" tIns="0" rIns="0" bIns="0" rtlCol="0" anchor="ctr"/>
           <a:lstStyle/>
           <a:p>
             <a:pPr algn="ctr"/>
@@ -5951,7 +5929,7 @@
           <a:noFill/>
         </p:spPr>
         <p:txBody>
-          <a:bodyPr wrap="square" lIns="0" rIns="0" tIns="0" bIns="0">
+          <a:bodyPr wrap="square" lIns="0" tIns="0" rIns="0" bIns="0">
             <a:spAutoFit/>
           </a:bodyPr>
           <a:lstStyle/>
@@ -5986,7 +5964,7 @@
           <a:noFill/>
         </p:spPr>
         <p:txBody>
-          <a:bodyPr wrap="square" lIns="0" rIns="0" tIns="0" bIns="0">
+          <a:bodyPr wrap="square" lIns="0" tIns="0" rIns="0" bIns="0">
             <a:spAutoFit/>
           </a:bodyPr>
           <a:lstStyle/>
@@ -6021,7 +5999,7 @@
           <a:noFill/>
         </p:spPr>
         <p:txBody>
-          <a:bodyPr wrap="square" lIns="0" rIns="0" tIns="0" bIns="0">
+          <a:bodyPr wrap="square" lIns="0" tIns="0" rIns="0" bIns="0">
             <a:spAutoFit/>
           </a:bodyPr>
           <a:lstStyle/>
@@ -6083,6 +6061,7 @@
           <a:lstStyle/>
           <a:p>
             <a:pPr algn="ctr"/>
+            <a:endParaRPr/>
           </a:p>
         </p:txBody>
       </p:sp>
@@ -6122,7 +6101,7 @@
           </a:fontRef>
         </p:style>
         <p:txBody>
-          <a:bodyPr rtlCol="0" anchor="ctr" lIns="0" rIns="0" tIns="0" bIns="0"/>
+          <a:bodyPr lIns="0" tIns="0" rIns="0" bIns="0" rtlCol="0" anchor="ctr"/>
           <a:lstStyle/>
           <a:p>
             <a:pPr algn="ctr"/>
@@ -6154,7 +6133,7 @@
           <a:noFill/>
         </p:spPr>
         <p:txBody>
-          <a:bodyPr wrap="square" lIns="0" rIns="0" tIns="0" bIns="0">
+          <a:bodyPr wrap="square" lIns="0" tIns="0" rIns="0" bIns="0">
             <a:spAutoFit/>
           </a:bodyPr>
           <a:lstStyle/>
@@ -6189,7 +6168,7 @@
           <a:noFill/>
         </p:spPr>
         <p:txBody>
-          <a:bodyPr wrap="square" lIns="0" rIns="0" tIns="0" bIns="0">
+          <a:bodyPr wrap="square" lIns="0" tIns="0" rIns="0" bIns="0">
             <a:spAutoFit/>
           </a:bodyPr>
           <a:lstStyle/>
@@ -6224,7 +6203,7 @@
           <a:noFill/>
         </p:spPr>
         <p:txBody>
-          <a:bodyPr wrap="square" lIns="0" rIns="0" tIns="0" bIns="0">
+          <a:bodyPr wrap="square" lIns="0" tIns="0" rIns="0" bIns="0">
             <a:spAutoFit/>
           </a:bodyPr>
           <a:lstStyle/>
@@ -6259,7 +6238,7 @@
           <a:noFill/>
         </p:spPr>
         <p:txBody>
-          <a:bodyPr wrap="square" lIns="0" rIns="0" tIns="0" bIns="0">
+          <a:bodyPr wrap="square" lIns="0" tIns="0" rIns="0" bIns="0">
             <a:spAutoFit/>
           </a:bodyPr>
           <a:lstStyle/>
@@ -6286,7 +6265,7 @@
 </file>
 
 <file path=ppt/slides/slide5.xml><?xml version="1.0" encoding="utf-8"?>
-<p:sld xmlns:a="http://schemas.openxmlformats.org/drawingml/2006/main" xmlns:p="http://schemas.openxmlformats.org/presentationml/2006/main" xmlns:r="http://schemas.openxmlformats.org/officeDocument/2006/relationships">
+<p:sld xmlns:a="http://schemas.openxmlformats.org/drawingml/2006/main" xmlns:r="http://schemas.openxmlformats.org/officeDocument/2006/relationships" xmlns:p="http://schemas.openxmlformats.org/presentationml/2006/main">
   <p:cSld>
     <p:spTree>
       <p:nvGrpSpPr>
@@ -6294,7 +6273,14 @@
         <p:cNvGrpSpPr/>
         <p:nvPr/>
       </p:nvGrpSpPr>
-      <p:grpSpPr/>
+      <p:grpSpPr>
+        <a:xfrm>
+          <a:off x="0" y="0"/>
+          <a:ext cx="0" cy="0"/>
+          <a:chOff x="0" y="0"/>
+          <a:chExt cx="0" cy="0"/>
+        </a:xfrm>
+      </p:grpSpPr>
       <p:sp>
         <p:nvSpPr>
           <p:cNvPr id="2" name="Rectangle 1"/>
@@ -6336,6 +6322,7 @@
           <a:lstStyle/>
           <a:p>
             <a:pPr algn="ctr"/>
+            <a:endParaRPr/>
           </a:p>
         </p:txBody>
       </p:sp>
@@ -6379,6 +6366,7 @@
           <a:lstStyle/>
           <a:p>
             <a:pPr algn="ctr"/>
+            <a:endParaRPr/>
           </a:p>
         </p:txBody>
       </p:sp>
@@ -6418,7 +6406,7 @@
           </a:fontRef>
         </p:style>
         <p:txBody>
-          <a:bodyPr rtlCol="0" anchor="ctr" lIns="0" rIns="0" tIns="0" bIns="0"/>
+          <a:bodyPr lIns="0" tIns="0" rIns="0" bIns="0" rtlCol="0" anchor="ctr"/>
           <a:lstStyle/>
           <a:p>
             <a:pPr algn="ctr"/>
@@ -6443,7 +6431,7 @@
         <p:spPr>
           <a:xfrm>
             <a:off x="640080" y="777240"/>
-            <a:ext cx="10972800" cy="777240"/>
+            <a:ext cx="10972800" cy="523220"/>
           </a:xfrm>
           <a:prstGeom prst="rect">
             <a:avLst/>
@@ -6451,21 +6439,90 @@
           <a:noFill/>
         </p:spPr>
         <p:txBody>
-          <a:bodyPr wrap="square" lIns="0" rIns="0" tIns="0" bIns="0">
+          <a:bodyPr wrap="square" lIns="0" tIns="0" rIns="0" bIns="0">
             <a:spAutoFit/>
           </a:bodyPr>
           <a:lstStyle/>
           <a:p>
             <a:pPr algn="l"/>
             <a:r>
-              <a:rPr sz="3400" b="1" i="0">
+              <a:rPr sz="3400" b="1" i="0" dirty="0">
                 <a:solidFill>
                   <a:srgbClr val="0A193A"/>
                 </a:solidFill>
                 <a:latin typeface="Calibri"/>
               </a:rPr>
-              <a:t>Como diablos se codeo esto, regla por regla</a:t>
-            </a:r>
+              <a:t>Como diablos </a:t>
+            </a:r>
+            <a:r>
+              <a:rPr sz="3400" b="1" i="0" dirty="0" err="1">
+                <a:solidFill>
+                  <a:srgbClr val="0A193A"/>
+                </a:solidFill>
+                <a:latin typeface="Calibri"/>
+              </a:rPr>
+              <a:t>esto</a:t>
+            </a:r>
+            <a:r>
+              <a:rPr sz="3400" b="1" i="0" dirty="0">
+                <a:solidFill>
+                  <a:srgbClr val="0A193A"/>
+                </a:solidFill>
+                <a:latin typeface="Calibri"/>
+              </a:rPr>
+              <a:t>, </a:t>
+            </a:r>
+            <a:r>
+              <a:rPr sz="3400" b="1" i="0" dirty="0" err="1">
+                <a:solidFill>
+                  <a:srgbClr val="0A193A"/>
+                </a:solidFill>
+                <a:latin typeface="Calibri"/>
+              </a:rPr>
+              <a:t>regla</a:t>
+            </a:r>
+            <a:r>
+              <a:rPr sz="3400" b="1" i="0" dirty="0">
+                <a:solidFill>
+                  <a:srgbClr val="0A193A"/>
+                </a:solidFill>
+                <a:latin typeface="Calibri"/>
+              </a:rPr>
+              <a:t> </a:t>
+            </a:r>
+            <a:r>
+              <a:rPr sz="3400" b="1" i="0" dirty="0" err="1">
+                <a:solidFill>
+                  <a:srgbClr val="0A193A"/>
+                </a:solidFill>
+                <a:latin typeface="Calibri"/>
+              </a:rPr>
+              <a:t>por</a:t>
+            </a:r>
+            <a:r>
+              <a:rPr sz="3400" b="1" i="0" dirty="0">
+                <a:solidFill>
+                  <a:srgbClr val="0A193A"/>
+                </a:solidFill>
+                <a:latin typeface="Calibri"/>
+              </a:rPr>
+              <a:t> </a:t>
+            </a:r>
+            <a:r>
+              <a:rPr sz="3400" b="1" i="0" dirty="0" err="1">
+                <a:solidFill>
+                  <a:srgbClr val="0A193A"/>
+                </a:solidFill>
+                <a:latin typeface="Calibri"/>
+              </a:rPr>
+              <a:t>regla</a:t>
+            </a:r>
+            <a:endParaRPr sz="3400" b="1" i="0" dirty="0">
+              <a:solidFill>
+                <a:srgbClr val="0A193A"/>
+              </a:solidFill>
+              <a:latin typeface="Calibri"/>
+            </a:endParaRPr>
           </a:p>
         </p:txBody>
       </p:sp>
@@ -6486,7 +6543,7 @@
           <a:noFill/>
         </p:spPr>
         <p:txBody>
-          <a:bodyPr wrap="square" lIns="0" rIns="0" tIns="0" bIns="0">
+          <a:bodyPr wrap="square" lIns="0" tIns="0" rIns="0" bIns="0">
             <a:spAutoFit/>
           </a:bodyPr>
           <a:lstStyle/>
@@ -6556,7 +6613,7 @@
           <a:noFill/>
         </p:spPr>
         <p:txBody>
-          <a:bodyPr wrap="square" lIns="0" rIns="0" tIns="0" bIns="0">
+          <a:bodyPr wrap="square" lIns="0" tIns="0" rIns="0" bIns="0">
             <a:spAutoFit/>
           </a:bodyPr>
           <a:lstStyle/>
@@ -6591,7 +6648,7 @@
           <a:noFill/>
         </p:spPr>
         <p:txBody>
-          <a:bodyPr wrap="square" lIns="0" rIns="0" tIns="0" bIns="0">
+          <a:bodyPr wrap="square" lIns="0" tIns="0" rIns="0" bIns="0">
             <a:spAutoFit/>
           </a:bodyPr>
           <a:lstStyle/>
@@ -6626,7 +6683,7 @@
           <a:noFill/>
         </p:spPr>
         <p:txBody>
-          <a:bodyPr wrap="square" lIns="0" rIns="0" tIns="0" bIns="0">
+          <a:bodyPr wrap="square" lIns="0" tIns="0" rIns="0" bIns="0">
             <a:spAutoFit/>
           </a:bodyPr>
           <a:lstStyle/>
@@ -6661,7 +6718,7 @@
           <a:noFill/>
         </p:spPr>
         <p:txBody>
-          <a:bodyPr wrap="square" lIns="0" rIns="0" tIns="0" bIns="0">
+          <a:bodyPr wrap="square" lIns="0" tIns="0" rIns="0" bIns="0">
             <a:spAutoFit/>
           </a:bodyPr>
           <a:lstStyle/>
@@ -6696,7 +6753,7 @@
           <a:noFill/>
         </p:spPr>
         <p:txBody>
-          <a:bodyPr wrap="square" lIns="0" rIns="0" tIns="0" bIns="0">
+          <a:bodyPr wrap="square" lIns="0" tIns="0" rIns="0" bIns="0">
             <a:spAutoFit/>
           </a:bodyPr>
           <a:lstStyle/>
@@ -6731,7 +6788,7 @@
           <a:noFill/>
         </p:spPr>
         <p:txBody>
-          <a:bodyPr wrap="square" lIns="0" rIns="0" tIns="0" bIns="0">
+          <a:bodyPr wrap="square" lIns="0" tIns="0" rIns="0" bIns="0">
             <a:spAutoFit/>
           </a:bodyPr>
           <a:lstStyle/>
@@ -6766,7 +6823,7 @@
           <a:noFill/>
         </p:spPr>
         <p:txBody>
-          <a:bodyPr wrap="square" lIns="0" rIns="0" tIns="0" bIns="0">
+          <a:bodyPr wrap="square" lIns="0" tIns="0" rIns="0" bIns="0">
             <a:spAutoFit/>
           </a:bodyPr>
           <a:lstStyle/>
@@ -6801,7 +6858,7 @@
           <a:noFill/>
         </p:spPr>
         <p:txBody>
-          <a:bodyPr wrap="square" lIns="0" rIns="0" tIns="0" bIns="0">
+          <a:bodyPr wrap="square" lIns="0" tIns="0" rIns="0" bIns="0">
             <a:spAutoFit/>
           </a:bodyPr>
           <a:lstStyle/>
@@ -6855,7 +6912,7 @@
           </a:fontRef>
         </p:style>
         <p:txBody>
-          <a:bodyPr rtlCol="0" anchor="ctr" lIns="0" rIns="0" tIns="0" bIns="0"/>
+          <a:bodyPr lIns="0" tIns="0" rIns="0" bIns="0" rtlCol="0" anchor="ctr"/>
           <a:lstStyle/>
           <a:p>
             <a:pPr algn="ctr"/>
@@ -6887,7 +6944,7 @@
           <a:noFill/>
         </p:spPr>
         <p:txBody>
-          <a:bodyPr wrap="square" lIns="0" rIns="0" tIns="0" bIns="0">
+          <a:bodyPr wrap="square" lIns="0" tIns="0" rIns="0" bIns="0">
             <a:spAutoFit/>
           </a:bodyPr>
           <a:lstStyle/>
@@ -6922,7 +6979,7 @@
           <a:noFill/>
         </p:spPr>
         <p:txBody>
-          <a:bodyPr wrap="square" lIns="0" rIns="0" tIns="0" bIns="0">
+          <a:bodyPr wrap="square" lIns="0" tIns="0" rIns="0" bIns="0">
             <a:spAutoFit/>
           </a:bodyPr>
           <a:lstStyle/>
@@ -6976,7 +7033,7 @@
           </a:fontRef>
         </p:style>
         <p:txBody>
-          <a:bodyPr rtlCol="0" anchor="ctr" lIns="0" rIns="0" tIns="0" bIns="0"/>
+          <a:bodyPr lIns="0" tIns="0" rIns="0" bIns="0" rtlCol="0" anchor="ctr"/>
           <a:lstStyle/>
           <a:p>
             <a:pPr algn="ctr"/>
@@ -7008,7 +7065,7 @@
           <a:noFill/>
         </p:spPr>
         <p:txBody>
-          <a:bodyPr wrap="square" lIns="0" rIns="0" tIns="0" bIns="0">
+          <a:bodyPr wrap="square" lIns="0" tIns="0" rIns="0" bIns="0">
             <a:spAutoFit/>
           </a:bodyPr>
           <a:lstStyle/>
@@ -7043,7 +7100,7 @@
           <a:noFill/>
         </p:spPr>
         <p:txBody>
-          <a:bodyPr wrap="square" lIns="0" rIns="0" tIns="0" bIns="0">
+          <a:bodyPr wrap="square" lIns="0" tIns="0" rIns="0" bIns="0">
             <a:spAutoFit/>
           </a:bodyPr>
           <a:lstStyle/>
@@ -7097,7 +7154,7 @@
           </a:fontRef>
         </p:style>
         <p:txBody>
-          <a:bodyPr rtlCol="0" anchor="ctr" lIns="0" rIns="0" tIns="0" bIns="0"/>
+          <a:bodyPr lIns="0" tIns="0" rIns="0" bIns="0" rtlCol="0" anchor="ctr"/>
           <a:lstStyle/>
           <a:p>
             <a:pPr algn="ctr"/>
@@ -7129,7 +7186,7 @@
           <a:noFill/>
         </p:spPr>
         <p:txBody>
-          <a:bodyPr wrap="square" lIns="0" rIns="0" tIns="0" bIns="0">
+          <a:bodyPr wrap="square" lIns="0" tIns="0" rIns="0" bIns="0">
             <a:spAutoFit/>
           </a:bodyPr>
           <a:lstStyle/>
@@ -7164,7 +7221,7 @@
           <a:noFill/>
         </p:spPr>
         <p:txBody>
-          <a:bodyPr wrap="square" lIns="0" rIns="0" tIns="0" bIns="0">
+          <a:bodyPr wrap="square" lIns="0" tIns="0" rIns="0" bIns="0">
             <a:spAutoFit/>
           </a:bodyPr>
           <a:lstStyle/>
@@ -7218,7 +7275,7 @@
           </a:fontRef>
         </p:style>
         <p:txBody>
-          <a:bodyPr rtlCol="0" anchor="ctr" lIns="0" rIns="0" tIns="0" bIns="0"/>
+          <a:bodyPr lIns="0" tIns="0" rIns="0" bIns="0" rtlCol="0" anchor="ctr"/>
           <a:lstStyle/>
           <a:p>
             <a:pPr algn="ctr"/>
@@ -7250,7 +7307,7 @@
           <a:noFill/>
         </p:spPr>
         <p:txBody>
-          <a:bodyPr wrap="square" lIns="0" rIns="0" tIns="0" bIns="0">
+          <a:bodyPr wrap="square" lIns="0" tIns="0" rIns="0" bIns="0">
             <a:spAutoFit/>
           </a:bodyPr>
           <a:lstStyle/>
@@ -7285,7 +7342,7 @@
           <a:noFill/>
         </p:spPr>
         <p:txBody>
-          <a:bodyPr wrap="square" lIns="0" rIns="0" tIns="0" bIns="0">
+          <a:bodyPr wrap="square" lIns="0" tIns="0" rIns="0" bIns="0">
             <a:spAutoFit/>
           </a:bodyPr>
           <a:lstStyle/>
@@ -7339,7 +7396,7 @@
           </a:fontRef>
         </p:style>
         <p:txBody>
-          <a:bodyPr rtlCol="0" anchor="ctr" lIns="0" rIns="0" tIns="0" bIns="0"/>
+          <a:bodyPr lIns="0" tIns="0" rIns="0" bIns="0" rtlCol="0" anchor="ctr"/>
           <a:lstStyle/>
           <a:p>
             <a:pPr algn="ctr"/>
@@ -7371,7 +7428,7 @@
           <a:noFill/>
         </p:spPr>
         <p:txBody>
-          <a:bodyPr wrap="square" lIns="0" rIns="0" tIns="0" bIns="0">
+          <a:bodyPr wrap="square" lIns="0" tIns="0" rIns="0" bIns="0">
             <a:spAutoFit/>
           </a:bodyPr>
           <a:lstStyle/>
@@ -7406,7 +7463,7 @@
           <a:noFill/>
         </p:spPr>
         <p:txBody>
-          <a:bodyPr wrap="square" lIns="0" rIns="0" tIns="0" bIns="0">
+          <a:bodyPr wrap="square" lIns="0" tIns="0" rIns="0" bIns="0">
             <a:spAutoFit/>
           </a:bodyPr>
           <a:lstStyle/>
@@ -7460,7 +7517,7 @@
           </a:fontRef>
         </p:style>
         <p:txBody>
-          <a:bodyPr rtlCol="0" anchor="ctr" lIns="0" rIns="0" tIns="0" bIns="0"/>
+          <a:bodyPr lIns="0" tIns="0" rIns="0" bIns="0" rtlCol="0" anchor="ctr"/>
           <a:lstStyle/>
           <a:p>
             <a:pPr algn="ctr"/>
@@ -7492,7 +7549,7 @@
           <a:noFill/>
         </p:spPr>
         <p:txBody>
-          <a:bodyPr wrap="square" lIns="0" rIns="0" tIns="0" bIns="0">
+          <a:bodyPr wrap="square" lIns="0" tIns="0" rIns="0" bIns="0">
             <a:spAutoFit/>
           </a:bodyPr>
           <a:lstStyle/>
@@ -7527,7 +7584,7 @@
           <a:noFill/>
         </p:spPr>
         <p:txBody>
-          <a:bodyPr wrap="square" lIns="0" rIns="0" tIns="0" bIns="0">
+          <a:bodyPr wrap="square" lIns="0" tIns="0" rIns="0" bIns="0">
             <a:spAutoFit/>
           </a:bodyPr>
           <a:lstStyle/>
@@ -7562,7 +7619,7 @@
           <a:noFill/>
         </p:spPr>
         <p:txBody>
-          <a:bodyPr wrap="square" lIns="0" rIns="0" tIns="0" bIns="0">
+          <a:bodyPr wrap="square" lIns="0" tIns="0" rIns="0" bIns="0">
             <a:spAutoFit/>
           </a:bodyPr>
           <a:lstStyle/>
@@ -7589,7 +7646,7 @@
 </file>
 
 <file path=ppt/slides/slide6.xml><?xml version="1.0" encoding="utf-8"?>
-<p:sld xmlns:a="http://schemas.openxmlformats.org/drawingml/2006/main" xmlns:p="http://schemas.openxmlformats.org/presentationml/2006/main" xmlns:r="http://schemas.openxmlformats.org/officeDocument/2006/relationships">
+<p:sld xmlns:a="http://schemas.openxmlformats.org/drawingml/2006/main" xmlns:r="http://schemas.openxmlformats.org/officeDocument/2006/relationships" xmlns:p="http://schemas.openxmlformats.org/presentationml/2006/main">
   <p:cSld>
     <p:spTree>
       <p:nvGrpSpPr>
@@ -7597,7 +7654,14 @@
         <p:cNvGrpSpPr/>
         <p:nvPr/>
       </p:nvGrpSpPr>
-      <p:grpSpPr/>
+      <p:grpSpPr>
+        <a:xfrm>
+          <a:off x="0" y="0"/>
+          <a:ext cx="0" cy="0"/>
+          <a:chOff x="0" y="0"/>
+          <a:chExt cx="0" cy="0"/>
+        </a:xfrm>
+      </p:grpSpPr>
       <p:sp>
         <p:nvSpPr>
           <p:cNvPr id="2" name="Rectangle 1"/>
@@ -7639,6 +7703,7 @@
           <a:lstStyle/>
           <a:p>
             <a:pPr algn="ctr"/>
+            <a:endParaRPr/>
           </a:p>
         </p:txBody>
       </p:sp>
@@ -7682,6 +7747,7 @@
           <a:lstStyle/>
           <a:p>
             <a:pPr algn="ctr"/>
+            <a:endParaRPr/>
           </a:p>
         </p:txBody>
       </p:sp>
@@ -7721,7 +7787,7 @@
           </a:fontRef>
         </p:style>
         <p:txBody>
-          <a:bodyPr rtlCol="0" anchor="ctr" lIns="0" rIns="0" tIns="0" bIns="0"/>
+          <a:bodyPr lIns="0" tIns="0" rIns="0" bIns="0" rtlCol="0" anchor="ctr"/>
           <a:lstStyle/>
           <a:p>
             <a:pPr algn="ctr"/>
@@ -7754,7 +7820,7 @@
           <a:noFill/>
         </p:spPr>
         <p:txBody>
-          <a:bodyPr wrap="square" lIns="0" rIns="0" tIns="0" bIns="0">
+          <a:bodyPr wrap="square" lIns="0" tIns="0" rIns="0" bIns="0">
             <a:spAutoFit/>
           </a:bodyPr>
           <a:lstStyle/>
@@ -7789,7 +7855,7 @@
           <a:noFill/>
         </p:spPr>
         <p:txBody>
-          <a:bodyPr wrap="square" lIns="0" rIns="0" tIns="0" bIns="0">
+          <a:bodyPr wrap="square" lIns="0" tIns="0" rIns="0" bIns="0">
             <a:spAutoFit/>
           </a:bodyPr>
           <a:lstStyle/>
@@ -7886,6 +7952,7 @@
           <a:lstStyle/>
           <a:p>
             <a:pPr algn="ctr"/>
+            <a:endParaRPr/>
           </a:p>
         </p:txBody>
       </p:sp>
@@ -7906,7 +7973,7 @@
           <a:noFill/>
         </p:spPr>
         <p:txBody>
-          <a:bodyPr wrap="square" lIns="0" rIns="0" tIns="0" bIns="0">
+          <a:bodyPr wrap="square" lIns="0" tIns="0" rIns="0" bIns="0">
             <a:spAutoFit/>
           </a:bodyPr>
           <a:lstStyle/>
@@ -7941,7 +8008,7 @@
           <a:noFill/>
         </p:spPr>
         <p:txBody>
-          <a:bodyPr wrap="square" lIns="0" rIns="0" tIns="0" bIns="0">
+          <a:bodyPr wrap="square" lIns="0" tIns="0" rIns="0" bIns="0">
             <a:spAutoFit/>
           </a:bodyPr>
           <a:lstStyle/>
@@ -8027,6 +8094,7 @@
           <a:lstStyle/>
           <a:p>
             <a:pPr algn="ctr"/>
+            <a:endParaRPr/>
           </a:p>
         </p:txBody>
       </p:sp>
@@ -8047,7 +8115,7 @@
           <a:noFill/>
         </p:spPr>
         <p:txBody>
-          <a:bodyPr wrap="square" lIns="0" rIns="0" tIns="0" bIns="0">
+          <a:bodyPr wrap="square" lIns="0" tIns="0" rIns="0" bIns="0">
             <a:spAutoFit/>
           </a:bodyPr>
           <a:lstStyle/>
@@ -8082,7 +8150,7 @@
           <a:noFill/>
         </p:spPr>
         <p:txBody>
-          <a:bodyPr wrap="square" lIns="0" rIns="0" tIns="0" bIns="0">
+          <a:bodyPr wrap="square" lIns="0" tIns="0" rIns="0" bIns="0">
             <a:spAutoFit/>
           </a:bodyPr>
           <a:lstStyle/>
@@ -8168,6 +8236,7 @@
           <a:lstStyle/>
           <a:p>
             <a:pPr algn="ctr"/>
+            <a:endParaRPr/>
           </a:p>
         </p:txBody>
       </p:sp>
@@ -8188,7 +8257,7 @@
           <a:noFill/>
         </p:spPr>
         <p:txBody>
-          <a:bodyPr wrap="square" lIns="0" rIns="0" tIns="0" bIns="0">
+          <a:bodyPr wrap="square" lIns="0" tIns="0" rIns="0" bIns="0">
             <a:spAutoFit/>
           </a:bodyPr>
           <a:lstStyle/>
@@ -8223,7 +8292,7 @@
           <a:noFill/>
         </p:spPr>
         <p:txBody>
-          <a:bodyPr wrap="square" lIns="0" rIns="0" tIns="0" bIns="0">
+          <a:bodyPr wrap="square" lIns="0" tIns="0" rIns="0" bIns="0">
             <a:spAutoFit/>
           </a:bodyPr>
           <a:lstStyle/>
@@ -8309,6 +8378,7 @@
           <a:lstStyle/>
           <a:p>
             <a:pPr algn="ctr"/>
+            <a:endParaRPr/>
           </a:p>
         </p:txBody>
       </p:sp>
@@ -8329,7 +8399,7 @@
           <a:noFill/>
         </p:spPr>
         <p:txBody>
-          <a:bodyPr wrap="square" lIns="0" rIns="0" tIns="0" bIns="0">
+          <a:bodyPr wrap="square" lIns="0" tIns="0" rIns="0" bIns="0">
             <a:spAutoFit/>
           </a:bodyPr>
           <a:lstStyle/>
@@ -8364,7 +8434,7 @@
           <a:noFill/>
         </p:spPr>
         <p:txBody>
-          <a:bodyPr wrap="square" lIns="0" rIns="0" tIns="0" bIns="0">
+          <a:bodyPr wrap="square" lIns="0" tIns="0" rIns="0" bIns="0">
             <a:spAutoFit/>
           </a:bodyPr>
           <a:lstStyle/>
@@ -8423,7 +8493,7 @@
           <a:noFill/>
         </p:spPr>
         <p:txBody>
-          <a:bodyPr wrap="square" lIns="0" rIns="0" tIns="0" bIns="0">
+          <a:bodyPr wrap="square" lIns="0" tIns="0" rIns="0" bIns="0">
             <a:spAutoFit/>
           </a:bodyPr>
           <a:lstStyle/>
@@ -8450,7 +8520,7 @@
 </file>
 
 <file path=ppt/slides/slide7.xml><?xml version="1.0" encoding="utf-8"?>
-<p:sld xmlns:a="http://schemas.openxmlformats.org/drawingml/2006/main" xmlns:p="http://schemas.openxmlformats.org/presentationml/2006/main" xmlns:r="http://schemas.openxmlformats.org/officeDocument/2006/relationships">
+<p:sld xmlns:a="http://schemas.openxmlformats.org/drawingml/2006/main" xmlns:r="http://schemas.openxmlformats.org/officeDocument/2006/relationships" xmlns:p="http://schemas.openxmlformats.org/presentationml/2006/main">
   <p:cSld>
     <p:spTree>
       <p:nvGrpSpPr>
@@ -8458,7 +8528,14 @@
         <p:cNvGrpSpPr/>
         <p:nvPr/>
       </p:nvGrpSpPr>
-      <p:grpSpPr/>
+      <p:grpSpPr>
+        <a:xfrm>
+          <a:off x="0" y="0"/>
+          <a:ext cx="0" cy="0"/>
+          <a:chOff x="0" y="0"/>
+          <a:chExt cx="0" cy="0"/>
+        </a:xfrm>
+      </p:grpSpPr>
       <p:sp>
         <p:nvSpPr>
           <p:cNvPr id="2" name="Rectangle 1"/>
@@ -8500,6 +8577,7 @@
           <a:lstStyle/>
           <a:p>
             <a:pPr algn="ctr"/>
+            <a:endParaRPr/>
           </a:p>
         </p:txBody>
       </p:sp>
@@ -8543,6 +8621,7 @@
           <a:lstStyle/>
           <a:p>
             <a:pPr algn="ctr"/>
+            <a:endParaRPr/>
           </a:p>
         </p:txBody>
       </p:sp>
@@ -8582,7 +8661,7 @@
           </a:fontRef>
         </p:style>
         <p:txBody>
-          <a:bodyPr rtlCol="0" anchor="ctr" lIns="0" rIns="0" tIns="0" bIns="0"/>
+          <a:bodyPr lIns="0" tIns="0" rIns="0" bIns="0" rtlCol="0" anchor="ctr"/>
           <a:lstStyle/>
           <a:p>
             <a:pPr algn="ctr"/>
@@ -8615,7 +8694,7 @@
           <a:noFill/>
         </p:spPr>
         <p:txBody>
-          <a:bodyPr wrap="square" lIns="0" rIns="0" tIns="0" bIns="0">
+          <a:bodyPr wrap="square" lIns="0" tIns="0" rIns="0" bIns="0">
             <a:spAutoFit/>
           </a:bodyPr>
           <a:lstStyle/>
@@ -8650,7 +8729,7 @@
           <a:noFill/>
         </p:spPr>
         <p:txBody>
-          <a:bodyPr wrap="square" lIns="0" rIns="0" tIns="0" bIns="0">
+          <a:bodyPr wrap="square" lIns="0" tIns="0" rIns="0" bIns="0">
             <a:spAutoFit/>
           </a:bodyPr>
           <a:lstStyle/>
@@ -8741,7 +8820,7 @@
           </a:fontRef>
         </p:style>
         <p:txBody>
-          <a:bodyPr rtlCol="0" anchor="ctr" lIns="60000" rIns="60000" tIns="20000" bIns="20000"/>
+          <a:bodyPr lIns="60000" tIns="20000" rIns="60000" bIns="20000" rtlCol="0" anchor="ctr"/>
           <a:lstStyle/>
           <a:p>
             <a:pPr algn="ctr"/>
@@ -8795,7 +8874,7 @@
           </a:fontRef>
         </p:style>
         <p:txBody>
-          <a:bodyPr rtlCol="0" anchor="ctr" lIns="60000" rIns="60000" tIns="20000" bIns="20000"/>
+          <a:bodyPr lIns="60000" tIns="20000" rIns="60000" bIns="20000" rtlCol="0" anchor="ctr"/>
           <a:lstStyle/>
           <a:p>
             <a:pPr algn="ctr"/>
@@ -8849,7 +8928,7 @@
           </a:fontRef>
         </p:style>
         <p:txBody>
-          <a:bodyPr rtlCol="0" anchor="ctr" lIns="60000" rIns="60000" tIns="20000" bIns="20000"/>
+          <a:bodyPr lIns="60000" tIns="20000" rIns="60000" bIns="20000" rtlCol="0" anchor="ctr"/>
           <a:lstStyle/>
           <a:p>
             <a:pPr algn="ctr"/>
@@ -8903,7 +8982,7 @@
           </a:fontRef>
         </p:style>
         <p:txBody>
-          <a:bodyPr rtlCol="0" anchor="ctr" lIns="60000" rIns="60000" tIns="20000" bIns="20000"/>
+          <a:bodyPr lIns="60000" tIns="20000" rIns="60000" bIns="20000" rtlCol="0" anchor="ctr"/>
           <a:lstStyle/>
           <a:p>
             <a:pPr algn="ctr"/>
@@ -8957,7 +9036,7 @@
           </a:fontRef>
         </p:style>
         <p:txBody>
-          <a:bodyPr rtlCol="0" anchor="ctr" lIns="60000" rIns="60000" tIns="20000" bIns="20000"/>
+          <a:bodyPr lIns="60000" tIns="20000" rIns="60000" bIns="20000" rtlCol="0" anchor="ctr"/>
           <a:lstStyle/>
           <a:p>
             <a:pPr algn="ctr"/>
@@ -9011,7 +9090,7 @@
           </a:fontRef>
         </p:style>
         <p:txBody>
-          <a:bodyPr rtlCol="0" anchor="ctr" lIns="60000" rIns="60000" tIns="20000" bIns="20000"/>
+          <a:bodyPr lIns="60000" tIns="20000" rIns="60000" bIns="20000" rtlCol="0" anchor="ctr"/>
           <a:lstStyle/>
           <a:p>
             <a:pPr algn="ctr"/>
@@ -9065,7 +9144,7 @@
           </a:fontRef>
         </p:style>
         <p:txBody>
-          <a:bodyPr rtlCol="0" anchor="ctr" lIns="80000" rIns="60000" tIns="20000" bIns="20000"/>
+          <a:bodyPr lIns="80000" tIns="20000" rIns="60000" bIns="20000" rtlCol="0" anchor="ctr"/>
           <a:lstStyle/>
           <a:p>
             <a:pPr algn="l"/>
@@ -9119,7 +9198,7 @@
           </a:fontRef>
         </p:style>
         <p:txBody>
-          <a:bodyPr rtlCol="0" anchor="ctr" lIns="80000" rIns="60000" tIns="20000" bIns="20000"/>
+          <a:bodyPr lIns="80000" tIns="20000" rIns="60000" bIns="20000" rtlCol="0" anchor="ctr"/>
           <a:lstStyle/>
           <a:p>
             <a:pPr algn="ctr"/>
@@ -9173,7 +9252,7 @@
           </a:fontRef>
         </p:style>
         <p:txBody>
-          <a:bodyPr rtlCol="0" anchor="ctr" lIns="80000" rIns="60000" tIns="20000" bIns="20000"/>
+          <a:bodyPr lIns="80000" tIns="20000" rIns="60000" bIns="20000" rtlCol="0" anchor="ctr"/>
           <a:lstStyle/>
           <a:p>
             <a:pPr algn="ctr"/>
@@ -9227,7 +9306,7 @@
           </a:fontRef>
         </p:style>
         <p:txBody>
-          <a:bodyPr rtlCol="0" anchor="ctr" lIns="80000" rIns="60000" tIns="20000" bIns="20000"/>
+          <a:bodyPr lIns="80000" tIns="20000" rIns="60000" bIns="20000" rtlCol="0" anchor="ctr"/>
           <a:lstStyle/>
           <a:p>
             <a:pPr algn="ctr"/>
@@ -9281,7 +9360,7 @@
           </a:fontRef>
         </p:style>
         <p:txBody>
-          <a:bodyPr rtlCol="0" anchor="ctr" lIns="80000" rIns="60000" tIns="20000" bIns="20000"/>
+          <a:bodyPr lIns="80000" tIns="20000" rIns="60000" bIns="20000" rtlCol="0" anchor="ctr"/>
           <a:lstStyle/>
           <a:p>
             <a:pPr algn="ctr"/>
@@ -9335,7 +9414,7 @@
           </a:fontRef>
         </p:style>
         <p:txBody>
-          <a:bodyPr rtlCol="0" anchor="ctr" lIns="80000" rIns="60000" tIns="20000" bIns="20000"/>
+          <a:bodyPr lIns="80000" tIns="20000" rIns="60000" bIns="20000" rtlCol="0" anchor="ctr"/>
           <a:lstStyle/>
           <a:p>
             <a:pPr algn="ctr"/>
@@ -9389,7 +9468,7 @@
           </a:fontRef>
         </p:style>
         <p:txBody>
-          <a:bodyPr rtlCol="0" anchor="ctr" lIns="80000" rIns="60000" tIns="20000" bIns="20000"/>
+          <a:bodyPr lIns="80000" tIns="20000" rIns="60000" bIns="20000" rtlCol="0" anchor="ctr"/>
           <a:lstStyle/>
           <a:p>
             <a:pPr algn="l"/>
@@ -9443,7 +9522,7 @@
           </a:fontRef>
         </p:style>
         <p:txBody>
-          <a:bodyPr rtlCol="0" anchor="ctr" lIns="80000" rIns="60000" tIns="20000" bIns="20000"/>
+          <a:bodyPr lIns="80000" tIns="20000" rIns="60000" bIns="20000" rtlCol="0" anchor="ctr"/>
           <a:lstStyle/>
           <a:p>
             <a:pPr algn="ctr"/>
@@ -9497,7 +9576,7 @@
           </a:fontRef>
         </p:style>
         <p:txBody>
-          <a:bodyPr rtlCol="0" anchor="ctr" lIns="80000" rIns="60000" tIns="20000" bIns="20000"/>
+          <a:bodyPr lIns="80000" tIns="20000" rIns="60000" bIns="20000" rtlCol="0" anchor="ctr"/>
           <a:lstStyle/>
           <a:p>
             <a:pPr algn="ctr"/>
@@ -9551,7 +9630,7 @@
           </a:fontRef>
         </p:style>
         <p:txBody>
-          <a:bodyPr rtlCol="0" anchor="ctr" lIns="80000" rIns="60000" tIns="20000" bIns="20000"/>
+          <a:bodyPr lIns="80000" tIns="20000" rIns="60000" bIns="20000" rtlCol="0" anchor="ctr"/>
           <a:lstStyle/>
           <a:p>
             <a:pPr algn="ctr"/>
@@ -9605,7 +9684,7 @@
           </a:fontRef>
         </p:style>
         <p:txBody>
-          <a:bodyPr rtlCol="0" anchor="ctr" lIns="80000" rIns="60000" tIns="20000" bIns="20000"/>
+          <a:bodyPr lIns="80000" tIns="20000" rIns="60000" bIns="20000" rtlCol="0" anchor="ctr"/>
           <a:lstStyle/>
           <a:p>
             <a:pPr algn="ctr"/>
@@ -9659,7 +9738,7 @@
           </a:fontRef>
         </p:style>
         <p:txBody>
-          <a:bodyPr rtlCol="0" anchor="ctr" lIns="80000" rIns="60000" tIns="20000" bIns="20000"/>
+          <a:bodyPr lIns="80000" tIns="20000" rIns="60000" bIns="20000" rtlCol="0" anchor="ctr"/>
           <a:lstStyle/>
           <a:p>
             <a:pPr algn="ctr"/>
@@ -9713,7 +9792,7 @@
           </a:fontRef>
         </p:style>
         <p:txBody>
-          <a:bodyPr rtlCol="0" anchor="ctr" lIns="80000" rIns="60000" tIns="20000" bIns="20000"/>
+          <a:bodyPr lIns="80000" tIns="20000" rIns="60000" bIns="20000" rtlCol="0" anchor="ctr"/>
           <a:lstStyle/>
           <a:p>
             <a:pPr algn="l"/>
@@ -9767,7 +9846,7 @@
           </a:fontRef>
         </p:style>
         <p:txBody>
-          <a:bodyPr rtlCol="0" anchor="ctr" lIns="80000" rIns="60000" tIns="20000" bIns="20000"/>
+          <a:bodyPr lIns="80000" tIns="20000" rIns="60000" bIns="20000" rtlCol="0" anchor="ctr"/>
           <a:lstStyle/>
           <a:p>
             <a:pPr algn="ctr"/>
@@ -9821,7 +9900,7 @@
           </a:fontRef>
         </p:style>
         <p:txBody>
-          <a:bodyPr rtlCol="0" anchor="ctr" lIns="80000" rIns="60000" tIns="20000" bIns="20000"/>
+          <a:bodyPr lIns="80000" tIns="20000" rIns="60000" bIns="20000" rtlCol="0" anchor="ctr"/>
           <a:lstStyle/>
           <a:p>
             <a:pPr algn="ctr"/>
@@ -9875,7 +9954,7 @@
           </a:fontRef>
         </p:style>
         <p:txBody>
-          <a:bodyPr rtlCol="0" anchor="ctr" lIns="80000" rIns="60000" tIns="20000" bIns="20000"/>
+          <a:bodyPr lIns="80000" tIns="20000" rIns="60000" bIns="20000" rtlCol="0" anchor="ctr"/>
           <a:lstStyle/>
           <a:p>
             <a:pPr algn="ctr"/>
@@ -9929,7 +10008,7 @@
           </a:fontRef>
         </p:style>
         <p:txBody>
-          <a:bodyPr rtlCol="0" anchor="ctr" lIns="80000" rIns="60000" tIns="20000" bIns="20000"/>
+          <a:bodyPr lIns="80000" tIns="20000" rIns="60000" bIns="20000" rtlCol="0" anchor="ctr"/>
           <a:lstStyle/>
           <a:p>
             <a:pPr algn="ctr"/>
@@ -9983,7 +10062,7 @@
           </a:fontRef>
         </p:style>
         <p:txBody>
-          <a:bodyPr rtlCol="0" anchor="ctr" lIns="80000" rIns="60000" tIns="20000" bIns="20000"/>
+          <a:bodyPr lIns="80000" tIns="20000" rIns="60000" bIns="20000" rtlCol="0" anchor="ctr"/>
           <a:lstStyle/>
           <a:p>
             <a:pPr algn="ctr"/>
@@ -10037,7 +10116,7 @@
           </a:fontRef>
         </p:style>
         <p:txBody>
-          <a:bodyPr rtlCol="0" anchor="ctr" lIns="80000" rIns="60000" tIns="20000" bIns="20000"/>
+          <a:bodyPr lIns="80000" tIns="20000" rIns="60000" bIns="20000" rtlCol="0" anchor="ctr"/>
           <a:lstStyle/>
           <a:p>
             <a:pPr algn="l"/>
@@ -10091,7 +10170,7 @@
           </a:fontRef>
         </p:style>
         <p:txBody>
-          <a:bodyPr rtlCol="0" anchor="ctr" lIns="80000" rIns="60000" tIns="20000" bIns="20000"/>
+          <a:bodyPr lIns="80000" tIns="20000" rIns="60000" bIns="20000" rtlCol="0" anchor="ctr"/>
           <a:lstStyle/>
           <a:p>
             <a:pPr algn="ctr"/>
@@ -10145,7 +10224,7 @@
           </a:fontRef>
         </p:style>
         <p:txBody>
-          <a:bodyPr rtlCol="0" anchor="ctr" lIns="80000" rIns="60000" tIns="20000" bIns="20000"/>
+          <a:bodyPr lIns="80000" tIns="20000" rIns="60000" bIns="20000" rtlCol="0" anchor="ctr"/>
           <a:lstStyle/>
           <a:p>
             <a:pPr algn="ctr"/>
@@ -10199,7 +10278,7 @@
           </a:fontRef>
         </p:style>
         <p:txBody>
-          <a:bodyPr rtlCol="0" anchor="ctr" lIns="80000" rIns="60000" tIns="20000" bIns="20000"/>
+          <a:bodyPr lIns="80000" tIns="20000" rIns="60000" bIns="20000" rtlCol="0" anchor="ctr"/>
           <a:lstStyle/>
           <a:p>
             <a:pPr algn="ctr"/>
@@ -10253,7 +10332,7 @@
           </a:fontRef>
         </p:style>
         <p:txBody>
-          <a:bodyPr rtlCol="0" anchor="ctr" lIns="80000" rIns="60000" tIns="20000" bIns="20000"/>
+          <a:bodyPr lIns="80000" tIns="20000" rIns="60000" bIns="20000" rtlCol="0" anchor="ctr"/>
           <a:lstStyle/>
           <a:p>
             <a:pPr algn="ctr"/>
@@ -10307,7 +10386,7 @@
           </a:fontRef>
         </p:style>
         <p:txBody>
-          <a:bodyPr rtlCol="0" anchor="ctr" lIns="80000" rIns="60000" tIns="20000" bIns="20000"/>
+          <a:bodyPr lIns="80000" tIns="20000" rIns="60000" bIns="20000" rtlCol="0" anchor="ctr"/>
           <a:lstStyle/>
           <a:p>
             <a:pPr algn="ctr"/>
@@ -10361,7 +10440,7 @@
           </a:fontRef>
         </p:style>
         <p:txBody>
-          <a:bodyPr rtlCol="0" anchor="ctr" lIns="80000" rIns="60000" tIns="20000" bIns="20000"/>
+          <a:bodyPr lIns="80000" tIns="20000" rIns="60000" bIns="20000" rtlCol="0" anchor="ctr"/>
           <a:lstStyle/>
           <a:p>
             <a:pPr algn="l"/>
@@ -10415,7 +10494,7 @@
           </a:fontRef>
         </p:style>
         <p:txBody>
-          <a:bodyPr rtlCol="0" anchor="ctr" lIns="80000" rIns="60000" tIns="20000" bIns="20000"/>
+          <a:bodyPr lIns="80000" tIns="20000" rIns="60000" bIns="20000" rtlCol="0" anchor="ctr"/>
           <a:lstStyle/>
           <a:p>
             <a:pPr algn="ctr"/>
@@ -10469,7 +10548,7 @@
           </a:fontRef>
         </p:style>
         <p:txBody>
-          <a:bodyPr rtlCol="0" anchor="ctr" lIns="80000" rIns="60000" tIns="20000" bIns="20000"/>
+          <a:bodyPr lIns="80000" tIns="20000" rIns="60000" bIns="20000" rtlCol="0" anchor="ctr"/>
           <a:lstStyle/>
           <a:p>
             <a:pPr algn="ctr"/>
@@ -10523,7 +10602,7 @@
           </a:fontRef>
         </p:style>
         <p:txBody>
-          <a:bodyPr rtlCol="0" anchor="ctr" lIns="80000" rIns="60000" tIns="20000" bIns="20000"/>
+          <a:bodyPr lIns="80000" tIns="20000" rIns="60000" bIns="20000" rtlCol="0" anchor="ctr"/>
           <a:lstStyle/>
           <a:p>
             <a:pPr algn="ctr"/>
@@ -10577,7 +10656,7 @@
           </a:fontRef>
         </p:style>
         <p:txBody>
-          <a:bodyPr rtlCol="0" anchor="ctr" lIns="80000" rIns="60000" tIns="20000" bIns="20000"/>
+          <a:bodyPr lIns="80000" tIns="20000" rIns="60000" bIns="20000" rtlCol="0" anchor="ctr"/>
           <a:lstStyle/>
           <a:p>
             <a:pPr algn="ctr"/>
@@ -10631,7 +10710,7 @@
           </a:fontRef>
         </p:style>
         <p:txBody>
-          <a:bodyPr rtlCol="0" anchor="ctr" lIns="80000" rIns="60000" tIns="20000" bIns="20000"/>
+          <a:bodyPr lIns="80000" tIns="20000" rIns="60000" bIns="20000" rtlCol="0" anchor="ctr"/>
           <a:lstStyle/>
           <a:p>
             <a:pPr algn="ctr"/>
@@ -10685,7 +10764,7 @@
           </a:fontRef>
         </p:style>
         <p:txBody>
-          <a:bodyPr rtlCol="0" anchor="ctr" lIns="80000" rIns="60000" tIns="20000" bIns="20000"/>
+          <a:bodyPr lIns="80000" tIns="20000" rIns="60000" bIns="20000" rtlCol="0" anchor="ctr"/>
           <a:lstStyle/>
           <a:p>
             <a:pPr algn="l"/>
@@ -10739,7 +10818,7 @@
           </a:fontRef>
         </p:style>
         <p:txBody>
-          <a:bodyPr rtlCol="0" anchor="ctr" lIns="80000" rIns="60000" tIns="20000" bIns="20000"/>
+          <a:bodyPr lIns="80000" tIns="20000" rIns="60000" bIns="20000" rtlCol="0" anchor="ctr"/>
           <a:lstStyle/>
           <a:p>
             <a:pPr algn="ctr"/>
@@ -10793,7 +10872,7 @@
           </a:fontRef>
         </p:style>
         <p:txBody>
-          <a:bodyPr rtlCol="0" anchor="ctr" lIns="80000" rIns="60000" tIns="20000" bIns="20000"/>
+          <a:bodyPr lIns="80000" tIns="20000" rIns="60000" bIns="20000" rtlCol="0" anchor="ctr"/>
           <a:lstStyle/>
           <a:p>
             <a:pPr algn="ctr"/>
@@ -10847,7 +10926,7 @@
           </a:fontRef>
         </p:style>
         <p:txBody>
-          <a:bodyPr rtlCol="0" anchor="ctr" lIns="80000" rIns="60000" tIns="20000" bIns="20000"/>
+          <a:bodyPr lIns="80000" tIns="20000" rIns="60000" bIns="20000" rtlCol="0" anchor="ctr"/>
           <a:lstStyle/>
           <a:p>
             <a:pPr algn="ctr"/>
@@ -10901,7 +10980,7 @@
           </a:fontRef>
         </p:style>
         <p:txBody>
-          <a:bodyPr rtlCol="0" anchor="ctr" lIns="80000" rIns="60000" tIns="20000" bIns="20000"/>
+          <a:bodyPr lIns="80000" tIns="20000" rIns="60000" bIns="20000" rtlCol="0" anchor="ctr"/>
           <a:lstStyle/>
           <a:p>
             <a:pPr algn="ctr"/>
@@ -10955,7 +11034,7 @@
           </a:fontRef>
         </p:style>
         <p:txBody>
-          <a:bodyPr rtlCol="0" anchor="ctr" lIns="80000" rIns="60000" tIns="20000" bIns="20000"/>
+          <a:bodyPr lIns="80000" tIns="20000" rIns="60000" bIns="20000" rtlCol="0" anchor="ctr"/>
           <a:lstStyle/>
           <a:p>
             <a:pPr algn="ctr"/>
@@ -11009,7 +11088,7 @@
           </a:fontRef>
         </p:style>
         <p:txBody>
-          <a:bodyPr rtlCol="0" anchor="ctr" lIns="80000" rIns="60000" tIns="20000" bIns="20000"/>
+          <a:bodyPr lIns="80000" tIns="20000" rIns="60000" bIns="20000" rtlCol="0" anchor="ctr"/>
           <a:lstStyle/>
           <a:p>
             <a:pPr algn="l"/>
@@ -11063,7 +11142,7 @@
           </a:fontRef>
         </p:style>
         <p:txBody>
-          <a:bodyPr rtlCol="0" anchor="ctr" lIns="80000" rIns="60000" tIns="20000" bIns="20000"/>
+          <a:bodyPr lIns="80000" tIns="20000" rIns="60000" bIns="20000" rtlCol="0" anchor="ctr"/>
           <a:lstStyle/>
           <a:p>
             <a:pPr algn="ctr"/>
@@ -11117,7 +11196,7 @@
           </a:fontRef>
         </p:style>
         <p:txBody>
-          <a:bodyPr rtlCol="0" anchor="ctr" lIns="80000" rIns="60000" tIns="20000" bIns="20000"/>
+          <a:bodyPr lIns="80000" tIns="20000" rIns="60000" bIns="20000" rtlCol="0" anchor="ctr"/>
           <a:lstStyle/>
           <a:p>
             <a:pPr algn="ctr"/>
@@ -11171,7 +11250,7 @@
           </a:fontRef>
         </p:style>
         <p:txBody>
-          <a:bodyPr rtlCol="0" anchor="ctr" lIns="80000" rIns="60000" tIns="20000" bIns="20000"/>
+          <a:bodyPr lIns="80000" tIns="20000" rIns="60000" bIns="20000" rtlCol="0" anchor="ctr"/>
           <a:lstStyle/>
           <a:p>
             <a:pPr algn="ctr"/>
@@ -11225,7 +11304,7 @@
           </a:fontRef>
         </p:style>
         <p:txBody>
-          <a:bodyPr rtlCol="0" anchor="ctr" lIns="80000" rIns="60000" tIns="20000" bIns="20000"/>
+          <a:bodyPr lIns="80000" tIns="20000" rIns="60000" bIns="20000" rtlCol="0" anchor="ctr"/>
           <a:lstStyle/>
           <a:p>
             <a:pPr algn="ctr"/>
@@ -11279,7 +11358,7 @@
           </a:fontRef>
         </p:style>
         <p:txBody>
-          <a:bodyPr rtlCol="0" anchor="ctr" lIns="80000" rIns="60000" tIns="20000" bIns="20000"/>
+          <a:bodyPr lIns="80000" tIns="20000" rIns="60000" bIns="20000" rtlCol="0" anchor="ctr"/>
           <a:lstStyle/>
           <a:p>
             <a:pPr algn="ctr"/>
@@ -11312,7 +11391,7 @@
           <a:noFill/>
         </p:spPr>
         <p:txBody>
-          <a:bodyPr wrap="square" lIns="0" rIns="0" tIns="0" bIns="0">
+          <a:bodyPr wrap="square" lIns="0" tIns="0" rIns="0" bIns="0">
             <a:spAutoFit/>
           </a:bodyPr>
           <a:lstStyle/>
@@ -11347,7 +11426,7 @@
           <a:noFill/>
         </p:spPr>
         <p:txBody>
-          <a:bodyPr wrap="square" lIns="0" rIns="0" tIns="0" bIns="0">
+          <a:bodyPr wrap="square" lIns="0" tIns="0" rIns="0" bIns="0">
             <a:spAutoFit/>
           </a:bodyPr>
           <a:lstStyle/>
@@ -11418,7 +11497,7 @@
           <a:noFill/>
         </p:spPr>
         <p:txBody>
-          <a:bodyPr wrap="square" lIns="0" rIns="0" tIns="0" bIns="0">
+          <a:bodyPr wrap="square" lIns="0" tIns="0" rIns="0" bIns="0">
             <a:spAutoFit/>
           </a:bodyPr>
           <a:lstStyle/>
@@ -11445,7 +11524,7 @@
 </file>
 
 <file path=ppt/slides/slide8.xml><?xml version="1.0" encoding="utf-8"?>
-<p:sld xmlns:a="http://schemas.openxmlformats.org/drawingml/2006/main" xmlns:p="http://schemas.openxmlformats.org/presentationml/2006/main" xmlns:r="http://schemas.openxmlformats.org/officeDocument/2006/relationships">
+<p:sld xmlns:a="http://schemas.openxmlformats.org/drawingml/2006/main" xmlns:r="http://schemas.openxmlformats.org/officeDocument/2006/relationships" xmlns:p="http://schemas.openxmlformats.org/presentationml/2006/main">
   <p:cSld>
     <p:spTree>
       <p:nvGrpSpPr>
@@ -11453,7 +11532,14 @@
         <p:cNvGrpSpPr/>
         <p:nvPr/>
       </p:nvGrpSpPr>
-      <p:grpSpPr/>
+      <p:grpSpPr>
+        <a:xfrm>
+          <a:off x="0" y="0"/>
+          <a:ext cx="0" cy="0"/>
+          <a:chOff x="0" y="0"/>
+          <a:chExt cx="0" cy="0"/>
+        </a:xfrm>
+      </p:grpSpPr>
       <p:sp>
         <p:nvSpPr>
           <p:cNvPr id="2" name="Rectangle 1"/>
@@ -11495,6 +11581,7 @@
           <a:lstStyle/>
           <a:p>
             <a:pPr algn="ctr"/>
+            <a:endParaRPr/>
           </a:p>
         </p:txBody>
       </p:sp>
@@ -11538,6 +11625,7 @@
           <a:lstStyle/>
           <a:p>
             <a:pPr algn="ctr"/>
+            <a:endParaRPr/>
           </a:p>
         </p:txBody>
       </p:sp>
@@ -11577,7 +11665,7 @@
           </a:fontRef>
         </p:style>
         <p:txBody>
-          <a:bodyPr rtlCol="0" anchor="ctr" lIns="0" rIns="0" tIns="0" bIns="0"/>
+          <a:bodyPr lIns="0" tIns="0" rIns="0" bIns="0" rtlCol="0" anchor="ctr"/>
           <a:lstStyle/>
           <a:p>
             <a:pPr algn="ctr"/>
@@ -11610,7 +11698,7 @@
           <a:noFill/>
         </p:spPr>
         <p:txBody>
-          <a:bodyPr wrap="square" lIns="0" rIns="0" tIns="0" bIns="0">
+          <a:bodyPr wrap="square" lIns="0" tIns="0" rIns="0" bIns="0">
             <a:spAutoFit/>
           </a:bodyPr>
           <a:lstStyle/>
@@ -11645,7 +11733,7 @@
           <a:noFill/>
         </p:spPr>
         <p:txBody>
-          <a:bodyPr wrap="square" lIns="0" rIns="0" tIns="0" bIns="0">
+          <a:bodyPr wrap="square" lIns="0" tIns="0" rIns="0" bIns="0">
             <a:spAutoFit/>
           </a:bodyPr>
           <a:lstStyle/>
@@ -11742,6 +11830,7 @@
           <a:lstStyle/>
           <a:p>
             <a:pPr algn="ctr"/>
+            <a:endParaRPr/>
           </a:p>
         </p:txBody>
       </p:sp>
@@ -11762,7 +11851,7 @@
           <a:noFill/>
         </p:spPr>
         <p:txBody>
-          <a:bodyPr wrap="square" lIns="0" rIns="0" tIns="0" bIns="0">
+          <a:bodyPr wrap="square" lIns="0" tIns="0" rIns="0" bIns="0">
             <a:spAutoFit/>
           </a:bodyPr>
           <a:lstStyle/>
@@ -11797,7 +11886,7 @@
           <a:noFill/>
         </p:spPr>
         <p:txBody>
-          <a:bodyPr wrap="square" lIns="0" rIns="0" tIns="0" bIns="0">
+          <a:bodyPr wrap="square" lIns="0" tIns="0" rIns="0" bIns="0">
             <a:spAutoFit/>
           </a:bodyPr>
           <a:lstStyle/>
@@ -11859,6 +11948,7 @@
           <a:lstStyle/>
           <a:p>
             <a:pPr algn="ctr"/>
+            <a:endParaRPr/>
           </a:p>
         </p:txBody>
       </p:sp>
@@ -11879,7 +11969,7 @@
           <a:noFill/>
         </p:spPr>
         <p:txBody>
-          <a:bodyPr wrap="square" lIns="0" rIns="0" tIns="0" bIns="0">
+          <a:bodyPr wrap="square" lIns="0" tIns="0" rIns="0" bIns="0">
             <a:spAutoFit/>
           </a:bodyPr>
           <a:lstStyle/>
@@ -11914,7 +12004,7 @@
           <a:noFill/>
         </p:spPr>
         <p:txBody>
-          <a:bodyPr wrap="square" lIns="0" rIns="0" tIns="0" bIns="0">
+          <a:bodyPr wrap="square" lIns="0" tIns="0" rIns="0" bIns="0">
             <a:spAutoFit/>
           </a:bodyPr>
           <a:lstStyle/>
@@ -11976,6 +12066,7 @@
           <a:lstStyle/>
           <a:p>
             <a:pPr algn="ctr"/>
+            <a:endParaRPr/>
           </a:p>
         </p:txBody>
       </p:sp>
@@ -11996,7 +12087,7 @@
           <a:noFill/>
         </p:spPr>
         <p:txBody>
-          <a:bodyPr wrap="square" lIns="0" rIns="0" tIns="0" bIns="0">
+          <a:bodyPr wrap="square" lIns="0" tIns="0" rIns="0" bIns="0">
             <a:spAutoFit/>
           </a:bodyPr>
           <a:lstStyle/>
@@ -12031,7 +12122,7 @@
           <a:noFill/>
         </p:spPr>
         <p:txBody>
-          <a:bodyPr wrap="square" lIns="0" rIns="0" tIns="0" bIns="0">
+          <a:bodyPr wrap="square" lIns="0" tIns="0" rIns="0" bIns="0">
             <a:spAutoFit/>
           </a:bodyPr>
           <a:lstStyle/>
@@ -12093,6 +12184,7 @@
           <a:lstStyle/>
           <a:p>
             <a:pPr algn="ctr"/>
+            <a:endParaRPr/>
           </a:p>
         </p:txBody>
       </p:sp>
@@ -12113,7 +12205,7 @@
           <a:noFill/>
         </p:spPr>
         <p:txBody>
-          <a:bodyPr wrap="square" lIns="0" rIns="0" tIns="0" bIns="0">
+          <a:bodyPr wrap="square" lIns="0" tIns="0" rIns="0" bIns="0">
             <a:spAutoFit/>
           </a:bodyPr>
           <a:lstStyle/>
@@ -12148,7 +12240,7 @@
           <a:noFill/>
         </p:spPr>
         <p:txBody>
-          <a:bodyPr wrap="square" lIns="0" rIns="0" tIns="0" bIns="0">
+          <a:bodyPr wrap="square" lIns="0" tIns="0" rIns="0" bIns="0">
             <a:spAutoFit/>
           </a:bodyPr>
           <a:lstStyle/>
@@ -12210,6 +12302,7 @@
           <a:lstStyle/>
           <a:p>
             <a:pPr algn="ctr"/>
+            <a:endParaRPr/>
           </a:p>
         </p:txBody>
       </p:sp>
@@ -12230,7 +12323,7 @@
           <a:noFill/>
         </p:spPr>
         <p:txBody>
-          <a:bodyPr wrap="square" lIns="0" rIns="0" tIns="0" bIns="0">
+          <a:bodyPr wrap="square" lIns="0" tIns="0" rIns="0" bIns="0">
             <a:spAutoFit/>
           </a:bodyPr>
           <a:lstStyle/>
@@ -12265,7 +12358,7 @@
           <a:noFill/>
         </p:spPr>
         <p:txBody>
-          <a:bodyPr wrap="square" lIns="0" rIns="0" tIns="0" bIns="0">
+          <a:bodyPr wrap="square" lIns="0" tIns="0" rIns="0" bIns="0">
             <a:spAutoFit/>
           </a:bodyPr>
           <a:lstStyle/>
@@ -12300,7 +12393,7 @@
           <a:noFill/>
         </p:spPr>
         <p:txBody>
-          <a:bodyPr wrap="square" lIns="0" rIns="0" tIns="0" bIns="0">
+          <a:bodyPr wrap="square" lIns="0" tIns="0" rIns="0" bIns="0">
             <a:spAutoFit/>
           </a:bodyPr>
           <a:lstStyle/>
@@ -12327,7 +12420,7 @@
 </file>
 
 <file path=ppt/slides/slide9.xml><?xml version="1.0" encoding="utf-8"?>
-<p:sld xmlns:a="http://schemas.openxmlformats.org/drawingml/2006/main" xmlns:p="http://schemas.openxmlformats.org/presentationml/2006/main" xmlns:r="http://schemas.openxmlformats.org/officeDocument/2006/relationships">
+<p:sld xmlns:a="http://schemas.openxmlformats.org/drawingml/2006/main" xmlns:r="http://schemas.openxmlformats.org/officeDocument/2006/relationships" xmlns:p="http://schemas.openxmlformats.org/presentationml/2006/main">
   <p:cSld>
     <p:spTree>
       <p:nvGrpSpPr>
@@ -12335,7 +12428,14 @@
         <p:cNvGrpSpPr/>
         <p:nvPr/>
       </p:nvGrpSpPr>
-      <p:grpSpPr/>
+      <p:grpSpPr>
+        <a:xfrm>
+          <a:off x="0" y="0"/>
+          <a:ext cx="0" cy="0"/>
+          <a:chOff x="0" y="0"/>
+          <a:chExt cx="0" cy="0"/>
+        </a:xfrm>
+      </p:grpSpPr>
       <p:sp>
         <p:nvSpPr>
           <p:cNvPr id="2" name="Rectangle 1"/>
@@ -12377,6 +12477,7 @@
           <a:lstStyle/>
           <a:p>
             <a:pPr algn="ctr"/>
+            <a:endParaRPr/>
           </a:p>
         </p:txBody>
       </p:sp>
@@ -12420,6 +12521,7 @@
           <a:lstStyle/>
           <a:p>
             <a:pPr algn="ctr"/>
+            <a:endParaRPr/>
           </a:p>
         </p:txBody>
       </p:sp>
@@ -12463,6 +12565,7 @@
           <a:lstStyle/>
           <a:p>
             <a:pPr algn="ctr"/>
+            <a:endParaRPr/>
           </a:p>
         </p:txBody>
       </p:sp>
@@ -12483,7 +12586,7 @@
           <a:noFill/>
         </p:spPr>
         <p:txBody>
-          <a:bodyPr wrap="square" lIns="0" rIns="0" tIns="0" bIns="0">
+          <a:bodyPr wrap="square" lIns="0" tIns="0" rIns="0" bIns="0">
             <a:spAutoFit/>
           </a:bodyPr>
           <a:lstStyle/>
@@ -12518,7 +12621,7 @@
           <a:noFill/>
         </p:spPr>
         <p:txBody>
-          <a:bodyPr wrap="square" lIns="0" rIns="0" tIns="0" bIns="0">
+          <a:bodyPr wrap="square" lIns="0" tIns="0" rIns="0" bIns="0">
             <a:spAutoFit/>
           </a:bodyPr>
           <a:lstStyle/>
@@ -12588,7 +12691,7 @@
           <a:noFill/>
         </p:spPr>
         <p:txBody>
-          <a:bodyPr wrap="square" lIns="0" rIns="0" tIns="0" bIns="0">
+          <a:bodyPr wrap="square" lIns="0" tIns="0" rIns="0" bIns="0">
             <a:spAutoFit/>
           </a:bodyPr>
           <a:lstStyle/>
@@ -12623,7 +12726,7 @@
           <a:noFill/>
         </p:spPr>
         <p:txBody>
-          <a:bodyPr wrap="square" lIns="0" rIns="0" tIns="0" bIns="0">
+          <a:bodyPr wrap="square" lIns="0" tIns="0" rIns="0" bIns="0">
             <a:spAutoFit/>
           </a:bodyPr>
           <a:lstStyle/>
@@ -12653,6 +12756,15 @@
           </a:p>
           <a:p>
             <a:pPr algn="l"/>
+            <a:endParaRPr sz="1500" b="0" i="0">
+              <a:solidFill>
+                <a:srgbClr val="ECE5D6"/>
+              </a:solidFill>
+              <a:latin typeface="Calibri"/>
+            </a:endParaRPr>
+          </a:p>
+          <a:p>
+            <a:pPr algn="l"/>
             <a:r>
               <a:rPr sz="1500" b="0" i="0">
                 <a:solidFill>
@@ -12660,7 +12772,7 @@
                 </a:solidFill>
                 <a:latin typeface="Calibri"/>
               </a:rPr>
-              <a:t/>
+              <a:t>A los compañeros del MACC con quienes discutimos descriptores, reglas y</a:t>
             </a:r>
           </a:p>
           <a:p>
@@ -12672,32 +12784,17 @@
                 </a:solidFill>
                 <a:latin typeface="Calibri"/>
               </a:rPr>
-              <a:t>A los compañeros del MACC con quienes discutimos descriptores, reglas y</a:t>
-            </a:r>
-          </a:p>
-          <a:p>
-            <a:pPr algn="l"/>
-            <a:r>
-              <a:rPr sz="1500" b="0" i="0">
-                <a:solidFill>
-                  <a:srgbClr val="ECE5D6"/>
-                </a:solidFill>
-                <a:latin typeface="Calibri"/>
-              </a:rPr>
               <a:t>estrategias de visualizacion hasta encontrar una representacion que cuadrara.</a:t>
             </a:r>
           </a:p>
           <a:p>
             <a:pPr algn="l"/>
-            <a:r>
-              <a:rPr sz="1500" b="0" i="0">
-                <a:solidFill>
-                  <a:srgbClr val="ECE5D6"/>
-                </a:solidFill>
-                <a:latin typeface="Calibri"/>
-              </a:rPr>
-              <a:t/>
-            </a:r>
+            <a:endParaRPr sz="1500" b="0" i="0">
+              <a:solidFill>
+                <a:srgbClr val="ECE5D6"/>
+              </a:solidFill>
+              <a:latin typeface="Calibri"/>
+            </a:endParaRPr>
           </a:p>
           <a:p>
             <a:pPr algn="l"/>
@@ -12742,7 +12839,7 @@
           <a:noFill/>
         </p:spPr>
         <p:txBody>
-          <a:bodyPr wrap="square" lIns="0" rIns="0" tIns="0" bIns="0">
+          <a:bodyPr wrap="square" lIns="0" tIns="0" rIns="0" bIns="0">
             <a:spAutoFit/>
           </a:bodyPr>
           <a:lstStyle/>
@@ -12777,7 +12874,7 @@
           <a:noFill/>
         </p:spPr>
         <p:txBody>
-          <a:bodyPr wrap="square" lIns="0" rIns="0" tIns="0" bIns="0">
+          <a:bodyPr wrap="square" lIns="0" tIns="0" rIns="0" bIns="0">
             <a:spAutoFit/>
           </a:bodyPr>
           <a:lstStyle/>
